--- a/images/dataintro_fig.pptx
+++ b/images/dataintro_fig.pptx
@@ -6,9 +6,10 @@
   </p:sldMasterIdLst>
   <p:sldIdLst>
     <p:sldId id="257" r:id="rId5"/>
-    <p:sldId id="259" r:id="rId6"/>
-    <p:sldId id="258" r:id="rId7"/>
-    <p:sldId id="260" r:id="rId8"/>
+    <p:sldId id="261" r:id="rId6"/>
+    <p:sldId id="259" r:id="rId7"/>
+    <p:sldId id="258" r:id="rId8"/>
+    <p:sldId id="260" r:id="rId9"/>
   </p:sldIdLst>
   <p:sldSz cx="12192000" cy="6858000"/>
   <p:notesSz cx="6858000" cy="9144000"/>
@@ -270,7 +271,7 @@
           <a:p>
             <a:fld id="{338BEB56-2203-4F1F-BF95-3372EF3570AD}" type="datetimeFigureOut">
               <a:rPr kumimoji="1" lang="ja-JP" altLang="en-US" smtClean="0"/>
-              <a:t>2026/3/3</a:t>
+              <a:t>2026/3/24</a:t>
             </a:fld>
             <a:endParaRPr kumimoji="1" lang="ja-JP" altLang="en-US"/>
           </a:p>
@@ -454,7 +455,7 @@
           <a:p>
             <a:fld id="{338BEB56-2203-4F1F-BF95-3372EF3570AD}" type="datetimeFigureOut">
               <a:rPr kumimoji="1" lang="ja-JP" altLang="en-US" smtClean="0"/>
-              <a:t>2026/3/3</a:t>
+              <a:t>2026/3/24</a:t>
             </a:fld>
             <a:endParaRPr kumimoji="1" lang="ja-JP" altLang="en-US"/>
           </a:p>
@@ -671,7 +672,7 @@
           <a:p>
             <a:fld id="{338BEB56-2203-4F1F-BF95-3372EF3570AD}" type="datetimeFigureOut">
               <a:rPr kumimoji="1" lang="ja-JP" altLang="en-US" smtClean="0"/>
-              <a:t>2026/3/3</a:t>
+              <a:t>2026/3/24</a:t>
             </a:fld>
             <a:endParaRPr kumimoji="1" lang="ja-JP" altLang="en-US"/>
           </a:p>
@@ -961,7 +962,7 @@
           <a:p>
             <a:fld id="{338BEB56-2203-4F1F-BF95-3372EF3570AD}" type="datetimeFigureOut">
               <a:rPr kumimoji="1" lang="ja-JP" altLang="en-US" smtClean="0"/>
-              <a:t>2026/3/3</a:t>
+              <a:t>2026/3/24</a:t>
             </a:fld>
             <a:endParaRPr kumimoji="1" lang="ja-JP" altLang="en-US"/>
           </a:p>
@@ -1256,7 +1257,7 @@
           <a:p>
             <a:fld id="{338BEB56-2203-4F1F-BF95-3372EF3570AD}" type="datetimeFigureOut">
               <a:rPr kumimoji="1" lang="ja-JP" altLang="en-US" smtClean="0"/>
-              <a:t>2026/3/3</a:t>
+              <a:t>2026/3/24</a:t>
             </a:fld>
             <a:endParaRPr kumimoji="1" lang="ja-JP" altLang="en-US"/>
           </a:p>
@@ -1491,7 +1492,7 @@
           <a:p>
             <a:fld id="{338BEB56-2203-4F1F-BF95-3372EF3570AD}" type="datetimeFigureOut">
               <a:rPr kumimoji="1" lang="ja-JP" altLang="en-US" smtClean="0"/>
-              <a:t>2026/3/3</a:t>
+              <a:t>2026/3/24</a:t>
             </a:fld>
             <a:endParaRPr kumimoji="1" lang="ja-JP" altLang="en-US"/>
           </a:p>
@@ -2202,7 +2203,7 @@
           <a:p>
             <a:fld id="{338BEB56-2203-4F1F-BF95-3372EF3570AD}" type="datetimeFigureOut">
               <a:rPr kumimoji="1" lang="ja-JP" altLang="en-US" smtClean="0"/>
-              <a:t>2026/3/3</a:t>
+              <a:t>2026/3/24</a:t>
             </a:fld>
             <a:endParaRPr kumimoji="1" lang="ja-JP" altLang="en-US"/>
           </a:p>
@@ -2311,7 +2312,7 @@
           <a:p>
             <a:fld id="{338BEB56-2203-4F1F-BF95-3372EF3570AD}" type="datetimeFigureOut">
               <a:rPr kumimoji="1" lang="ja-JP" altLang="en-US" smtClean="0"/>
-              <a:t>2026/3/3</a:t>
+              <a:t>2026/3/24</a:t>
             </a:fld>
             <a:endParaRPr kumimoji="1" lang="ja-JP" altLang="en-US"/>
           </a:p>
@@ -2495,7 +2496,7 @@
           <a:p>
             <a:fld id="{338BEB56-2203-4F1F-BF95-3372EF3570AD}" type="datetimeFigureOut">
               <a:rPr kumimoji="1" lang="ja-JP" altLang="en-US" smtClean="0"/>
-              <a:t>2026/3/3</a:t>
+              <a:t>2026/3/24</a:t>
             </a:fld>
             <a:endParaRPr kumimoji="1" lang="ja-JP" altLang="en-US"/>
           </a:p>
@@ -2590,7 +2591,7 @@
           <a:p>
             <a:fld id="{338BEB56-2203-4F1F-BF95-3372EF3570AD}" type="datetimeFigureOut">
               <a:rPr kumimoji="1" lang="ja-JP" altLang="en-US" smtClean="0"/>
-              <a:t>2026/3/3</a:t>
+              <a:t>2026/3/24</a:t>
             </a:fld>
             <a:endParaRPr kumimoji="1" lang="ja-JP" altLang="en-US"/>
           </a:p>
@@ -2837,7 +2838,7 @@
           <a:p>
             <a:fld id="{338BEB56-2203-4F1F-BF95-3372EF3570AD}" type="datetimeFigureOut">
               <a:rPr kumimoji="1" lang="ja-JP" altLang="en-US" smtClean="0"/>
-              <a:t>2026/3/3</a:t>
+              <a:t>2026/3/24</a:t>
             </a:fld>
             <a:endParaRPr kumimoji="1" lang="ja-JP" altLang="en-US"/>
           </a:p>
@@ -4116,6 +4117,66 @@
       </p:grpSpPr>
       <p:pic>
         <p:nvPicPr>
+          <p:cNvPr id="3" name="図 2">
+            <a:extLst>
+              <a:ext uri="{FF2B5EF4-FFF2-40B4-BE49-F238E27FC236}">
+                <a16:creationId xmlns:a16="http://schemas.microsoft.com/office/drawing/2014/main" id="{9556A544-22A9-5B80-6B2D-8654149BAE69}"/>
+              </a:ext>
+            </a:extLst>
+          </p:cNvPr>
+          <p:cNvPicPr>
+            <a:picLocks noChangeAspect="1"/>
+          </p:cNvPicPr>
+          <p:nvPr/>
+        </p:nvPicPr>
+        <p:blipFill>
+          <a:blip r:embed="rId2"/>
+          <a:stretch>
+            <a:fillRect/>
+          </a:stretch>
+        </p:blipFill>
+        <p:spPr>
+          <a:xfrm>
+            <a:off x="0" y="539880"/>
+            <a:ext cx="12192000" cy="5778239"/>
+          </a:xfrm>
+          <a:prstGeom prst="rect">
+            <a:avLst/>
+          </a:prstGeom>
+        </p:spPr>
+      </p:pic>
+    </p:spTree>
+    <p:extLst>
+      <p:ext uri="{BB962C8B-B14F-4D97-AF65-F5344CB8AC3E}">
+        <p14:creationId xmlns:p14="http://schemas.microsoft.com/office/powerpoint/2010/main" val="2371196411"/>
+      </p:ext>
+    </p:extLst>
+  </p:cSld>
+  <p:clrMapOvr>
+    <a:masterClrMapping/>
+  </p:clrMapOvr>
+</p:sld>
+</file>
+
+<file path=ppt/slides/slide3.xml><?xml version="1.0" encoding="utf-8"?>
+<p:sld xmlns:a="http://schemas.openxmlformats.org/drawingml/2006/main" xmlns:r="http://schemas.openxmlformats.org/officeDocument/2006/relationships" xmlns:p="http://schemas.openxmlformats.org/presentationml/2006/main">
+  <p:cSld>
+    <p:spTree>
+      <p:nvGrpSpPr>
+        <p:cNvPr id="1" name=""/>
+        <p:cNvGrpSpPr/>
+        <p:nvPr/>
+      </p:nvGrpSpPr>
+      <p:grpSpPr>
+        <a:xfrm>
+          <a:off x="0" y="0"/>
+          <a:ext cx="0" cy="0"/>
+          <a:chOff x="0" y="0"/>
+          <a:chExt cx="0" cy="0"/>
+        </a:xfrm>
+      </p:grpSpPr>
+      <p:pic>
+        <p:nvPicPr>
           <p:cNvPr id="4" name="図 3">
             <a:extLst>
               <a:ext uri="{FF2B5EF4-FFF2-40B4-BE49-F238E27FC236}">
@@ -4157,7 +4218,7 @@
 </p:sld>
 </file>
 
-<file path=ppt/slides/slide3.xml><?xml version="1.0" encoding="utf-8"?>
+<file path=ppt/slides/slide4.xml><?xml version="1.0" encoding="utf-8"?>
 <p:sld xmlns:a="http://schemas.openxmlformats.org/drawingml/2006/main" xmlns:r="http://schemas.openxmlformats.org/officeDocument/2006/relationships" xmlns:p="http://schemas.openxmlformats.org/presentationml/2006/main">
   <p:cSld>
     <p:spTree>
@@ -4217,7 +4278,7 @@
 </p:sld>
 </file>
 
-<file path=ppt/slides/slide4.xml><?xml version="1.0" encoding="utf-8"?>
+<file path=ppt/slides/slide5.xml><?xml version="1.0" encoding="utf-8"?>
 <p:sld xmlns:a="http://schemas.openxmlformats.org/drawingml/2006/main" xmlns:r="http://schemas.openxmlformats.org/officeDocument/2006/relationships" xmlns:p="http://schemas.openxmlformats.org/presentationml/2006/main">
   <p:cSld>
     <p:spTree>
@@ -4479,21 +4540,6 @@
 </file>
 
 <file path=customXml/item1.xml><?xml version="1.0" encoding="utf-8"?>
-<p:properties xmlns:p="http://schemas.microsoft.com/office/2006/metadata/properties" xmlns:xsi="http://www.w3.org/2001/XMLSchema-instance" xmlns:pc="http://schemas.microsoft.com/office/infopath/2007/PartnerControls">
-  <documentManagement/>
-</p:properties>
-</file>
-
-<file path=customXml/item2.xml><?xml version="1.0" encoding="utf-8"?>
-<?mso-contentType ?>
-<FormTemplates xmlns="http://schemas.microsoft.com/sharepoint/v3/contenttype/forms">
-  <Display>DocumentLibraryForm</Display>
-  <Edit>DocumentLibraryForm</Edit>
-  <New>DocumentLibraryForm</New>
-</FormTemplates>
-</file>
-
-<file path=customXml/item3.xml><?xml version="1.0" encoding="utf-8"?>
 <ct:contentTypeSchema xmlns:ct="http://schemas.microsoft.com/office/2006/metadata/contentType" xmlns:ma="http://schemas.microsoft.com/office/2006/metadata/properties/metaAttributes" ct:_="" ma:_="" ma:contentTypeName="ドキュメント" ma:contentTypeID="0x010100219926A4C099B3408C0368587ACC6DCA" ma:contentTypeVersion="4" ma:contentTypeDescription="新しいドキュメントを作成します。" ma:contentTypeScope="" ma:versionID="affc7309a2dfb5e1d1086f7d28d4c8f9">
   <xsd:schema xmlns:xsd="http://www.w3.org/2001/XMLSchema" xmlns:xs="http://www.w3.org/2001/XMLSchema" xmlns:p="http://schemas.microsoft.com/office/2006/metadata/properties" xmlns:ns3="c92ae596-f2ea-4fe5-8164-7ef5be6a5706" targetNamespace="http://schemas.microsoft.com/office/2006/metadata/properties" ma:root="true" ma:fieldsID="aad9b398109b3af73f51846e4562e877" ns3:_="">
     <xsd:import namespace="c92ae596-f2ea-4fe5-8164-7ef5be6a5706"/>
@@ -4637,31 +4683,22 @@
 </ct:contentTypeSchema>
 </file>
 
-<file path=customXml/itemProps1.xml><?xml version="1.0" encoding="utf-8"?>
-<ds:datastoreItem xmlns:ds="http://schemas.openxmlformats.org/officeDocument/2006/customXml" ds:itemID="{5D972508-A93B-4CFB-9C27-BD808F279085}">
-  <ds:schemaRefs>
-    <ds:schemaRef ds:uri="c92ae596-f2ea-4fe5-8164-7ef5be6a5706"/>
-    <ds:schemaRef ds:uri="http://purl.org/dc/dcmitype/"/>
-    <ds:schemaRef ds:uri="http://schemas.microsoft.com/office/2006/metadata/properties"/>
-    <ds:schemaRef ds:uri="http://www.w3.org/XML/1998/namespace"/>
-    <ds:schemaRef ds:uri="http://schemas.openxmlformats.org/package/2006/metadata/core-properties"/>
-    <ds:schemaRef ds:uri="http://purl.org/dc/terms/"/>
-    <ds:schemaRef ds:uri="http://schemas.microsoft.com/office/2006/documentManagement/types"/>
-    <ds:schemaRef ds:uri="http://schemas.microsoft.com/office/infopath/2007/PartnerControls"/>
-    <ds:schemaRef ds:uri="http://purl.org/dc/elements/1.1/"/>
-  </ds:schemaRefs>
-</ds:datastoreItem>
+<file path=customXml/item2.xml><?xml version="1.0" encoding="utf-8"?>
+<?mso-contentType ?>
+<FormTemplates xmlns="http://schemas.microsoft.com/sharepoint/v3/contenttype/forms">
+  <Display>DocumentLibraryForm</Display>
+  <Edit>DocumentLibraryForm</Edit>
+  <New>DocumentLibraryForm</New>
+</FormTemplates>
 </file>
 
-<file path=customXml/itemProps2.xml><?xml version="1.0" encoding="utf-8"?>
-<ds:datastoreItem xmlns:ds="http://schemas.openxmlformats.org/officeDocument/2006/customXml" ds:itemID="{AB851738-DD37-4E03-A76B-B763E2757B0B}">
-  <ds:schemaRefs>
-    <ds:schemaRef ds:uri="http://schemas.microsoft.com/sharepoint/v3/contenttype/forms"/>
-  </ds:schemaRefs>
-</ds:datastoreItem>
+<file path=customXml/item3.xml><?xml version="1.0" encoding="utf-8"?>
+<p:properties xmlns:p="http://schemas.microsoft.com/office/2006/metadata/properties" xmlns:xsi="http://www.w3.org/2001/XMLSchema-instance" xmlns:pc="http://schemas.microsoft.com/office/infopath/2007/PartnerControls">
+  <documentManagement/>
+</p:properties>
 </file>
 
-<file path=customXml/itemProps3.xml><?xml version="1.0" encoding="utf-8"?>
+<file path=customXml/itemProps1.xml><?xml version="1.0" encoding="utf-8"?>
 <ds:datastoreItem xmlns:ds="http://schemas.openxmlformats.org/officeDocument/2006/customXml" ds:itemID="{1E1D599E-7965-4A84-83CE-FB3B4A91916C}">
   <ds:schemaRefs>
     <ds:schemaRef ds:uri="http://schemas.microsoft.com/office/2006/metadata/contentType"/>
@@ -4677,4 +4714,28 @@
     <ds:schemaRef ds:uri="http://schemas.microsoft.com/internal/obd"/>
   </ds:schemaRefs>
 </ds:datastoreItem>
+</file>
+
+<file path=customXml/itemProps2.xml><?xml version="1.0" encoding="utf-8"?>
+<ds:datastoreItem xmlns:ds="http://schemas.openxmlformats.org/officeDocument/2006/customXml" ds:itemID="{AB851738-DD37-4E03-A76B-B763E2757B0B}">
+  <ds:schemaRefs>
+    <ds:schemaRef ds:uri="http://schemas.microsoft.com/sharepoint/v3/contenttype/forms"/>
+  </ds:schemaRefs>
+</ds:datastoreItem>
+</file>
+
+<file path=customXml/itemProps3.xml><?xml version="1.0" encoding="utf-8"?>
+<ds:datastoreItem xmlns:ds="http://schemas.openxmlformats.org/officeDocument/2006/customXml" ds:itemID="{5D972508-A93B-4CFB-9C27-BD808F279085}">
+  <ds:schemaRefs>
+    <ds:schemaRef ds:uri="c92ae596-f2ea-4fe5-8164-7ef5be6a5706"/>
+    <ds:schemaRef ds:uri="http://purl.org/dc/dcmitype/"/>
+    <ds:schemaRef ds:uri="http://schemas.microsoft.com/office/2006/metadata/properties"/>
+    <ds:schemaRef ds:uri="http://www.w3.org/XML/1998/namespace"/>
+    <ds:schemaRef ds:uri="http://schemas.openxmlformats.org/package/2006/metadata/core-properties"/>
+    <ds:schemaRef ds:uri="http://purl.org/dc/terms/"/>
+    <ds:schemaRef ds:uri="http://schemas.microsoft.com/office/2006/documentManagement/types"/>
+    <ds:schemaRef ds:uri="http://schemas.microsoft.com/office/infopath/2007/PartnerControls"/>
+    <ds:schemaRef ds:uri="http://purl.org/dc/elements/1.1/"/>
+  </ds:schemaRefs>
+</ds:datastoreItem>
 </file>
--- a/images/dataintro_fig.pptx
+++ b/images/dataintro_fig.pptx
@@ -6,10 +6,11 @@
   </p:sldMasterIdLst>
   <p:sldIdLst>
     <p:sldId id="257" r:id="rId5"/>
-    <p:sldId id="261" r:id="rId6"/>
-    <p:sldId id="259" r:id="rId7"/>
-    <p:sldId id="258" r:id="rId8"/>
-    <p:sldId id="260" r:id="rId9"/>
+    <p:sldId id="262" r:id="rId6"/>
+    <p:sldId id="261" r:id="rId7"/>
+    <p:sldId id="259" r:id="rId8"/>
+    <p:sldId id="258" r:id="rId9"/>
+    <p:sldId id="260" r:id="rId10"/>
   </p:sldIdLst>
   <p:sldSz cx="12192000" cy="6858000"/>
   <p:notesSz cx="6858000" cy="9144000"/>
@@ -116,6 +117,3064 @@
 </p:presentation>
 </file>
 
+<file path=ppt/charts/chart1.xml><?xml version="1.0" encoding="utf-8"?>
+<c:chartSpace xmlns:c="http://schemas.openxmlformats.org/drawingml/2006/chart" xmlns:a="http://schemas.openxmlformats.org/drawingml/2006/main" xmlns:r="http://schemas.openxmlformats.org/officeDocument/2006/relationships" xmlns:c16r2="http://schemas.microsoft.com/office/drawing/2015/06/chart">
+  <c:date1904 val="0"/>
+  <c:lang val="ja-JP"/>
+  <c:roundedCorners val="0"/>
+  <mc:AlternateContent xmlns:mc="http://schemas.openxmlformats.org/markup-compatibility/2006">
+    <mc:Choice xmlns:c14="http://schemas.microsoft.com/office/drawing/2007/8/2/chart" Requires="c14">
+      <c14:style val="102"/>
+    </mc:Choice>
+    <mc:Fallback>
+      <c:style val="2"/>
+    </mc:Fallback>
+  </mc:AlternateContent>
+  <c:chart>
+    <c:autoTitleDeleted val="1"/>
+    <c:plotArea>
+      <c:layout>
+        <c:manualLayout>
+          <c:layoutTarget val="inner"/>
+          <c:xMode val="edge"/>
+          <c:yMode val="edge"/>
+          <c:x val="2.6911314984709479E-2"/>
+          <c:y val="4.1882424611635702E-2"/>
+          <c:w val="0.946177370030581"/>
+          <c:h val="0.91623515077672857"/>
+        </c:manualLayout>
+      </c:layout>
+      <c:scatterChart>
+        <c:scatterStyle val="lineMarker"/>
+        <c:varyColors val="0"/>
+        <c:ser>
+          <c:idx val="0"/>
+          <c:order val="0"/>
+          <c:tx>
+            <c:strRef>
+              <c:f>Sheet1!$B$1</c:f>
+              <c:strCache>
+                <c:ptCount val="1"/>
+                <c:pt idx="0">
+                  <c:v>Y の値</c:v>
+                </c:pt>
+              </c:strCache>
+            </c:strRef>
+          </c:tx>
+          <c:spPr>
+            <a:ln w="19050" cap="rnd">
+              <a:noFill/>
+              <a:round/>
+            </a:ln>
+            <a:effectLst/>
+          </c:spPr>
+          <c:marker>
+            <c:symbol val="circle"/>
+            <c:size val="5"/>
+            <c:spPr>
+              <a:solidFill>
+                <a:schemeClr val="accent1"/>
+              </a:solidFill>
+              <a:ln w="9525">
+                <a:solidFill>
+                  <a:schemeClr val="accent1"/>
+                </a:solidFill>
+              </a:ln>
+              <a:effectLst/>
+            </c:spPr>
+          </c:marker>
+          <c:trendline>
+            <c:spPr>
+              <a:ln w="19050" cap="rnd">
+                <a:solidFill>
+                  <a:schemeClr val="accent1"/>
+                </a:solidFill>
+                <a:prstDash val="sysDot"/>
+              </a:ln>
+              <a:effectLst/>
+            </c:spPr>
+            <c:trendlineType val="linear"/>
+            <c:dispRSqr val="0"/>
+            <c:dispEq val="0"/>
+          </c:trendline>
+          <c:xVal>
+            <c:numRef>
+              <c:f>Sheet1!$A$2:$A$101</c:f>
+              <c:numCache>
+                <c:formatCode>General</c:formatCode>
+                <c:ptCount val="100"/>
+                <c:pt idx="0">
+                  <c:v>0.58700312512151498</c:v>
+                </c:pt>
+                <c:pt idx="1">
+                  <c:v>0.10370726021985488</c:v>
+                </c:pt>
+                <c:pt idx="2">
+                  <c:v>0.63562232469488011</c:v>
+                </c:pt>
+                <c:pt idx="3">
+                  <c:v>6.5671948082098752E-2</c:v>
+                </c:pt>
+                <c:pt idx="4">
+                  <c:v>0.10635056379856178</c:v>
+                </c:pt>
+                <c:pt idx="5">
+                  <c:v>0.96909440265198765</c:v>
+                </c:pt>
+                <c:pt idx="6">
+                  <c:v>0.86725213691685288</c:v>
+                </c:pt>
+                <c:pt idx="7">
+                  <c:v>0.96799843043846068</c:v>
+                </c:pt>
+                <c:pt idx="8">
+                  <c:v>0.63373160744434898</c:v>
+                </c:pt>
+                <c:pt idx="9">
+                  <c:v>0.11535552404156224</c:v>
+                </c:pt>
+                <c:pt idx="10">
+                  <c:v>0.53823058760535669</c:v>
+                </c:pt>
+                <c:pt idx="11">
+                  <c:v>0.31912468381647907</c:v>
+                </c:pt>
+                <c:pt idx="12">
+                  <c:v>0.45505767042807799</c:v>
+                </c:pt>
+                <c:pt idx="13">
+                  <c:v>0.8346639091401763</c:v>
+                </c:pt>
+                <c:pt idx="14">
+                  <c:v>0.85098414120265564</c:v>
+                </c:pt>
+                <c:pt idx="15">
+                  <c:v>0.62938392065772253</c:v>
+                </c:pt>
+                <c:pt idx="16">
+                  <c:v>9.3361110478718867E-2</c:v>
+                </c:pt>
+                <c:pt idx="17">
+                  <c:v>8.4464525129259727E-2</c:v>
+                </c:pt>
+                <c:pt idx="18">
+                  <c:v>0.47953291942725307</c:v>
+                </c:pt>
+                <c:pt idx="19">
+                  <c:v>0.78956576459360406</c:v>
+                </c:pt>
+                <c:pt idx="20">
+                  <c:v>0.22869542174371671</c:v>
+                </c:pt>
+                <c:pt idx="21">
+                  <c:v>0.37635356868158099</c:v>
+                </c:pt>
+                <c:pt idx="22">
+                  <c:v>0.29812380899961943</c:v>
+                </c:pt>
+                <c:pt idx="23">
+                  <c:v>0.34845402404004489</c:v>
+                </c:pt>
+                <c:pt idx="24">
+                  <c:v>6.3491765742251793E-4</c:v>
+                </c:pt>
+                <c:pt idx="25">
+                  <c:v>0.3708653851327588</c:v>
+                </c:pt>
+                <c:pt idx="26">
+                  <c:v>0.20990412238483758</c:v>
+                </c:pt>
+                <c:pt idx="27">
+                  <c:v>0.7509617646909531</c:v>
+                </c:pt>
+                <c:pt idx="28">
+                  <c:v>0.27811337033506822</c:v>
+                </c:pt>
+                <c:pt idx="29">
+                  <c:v>0.31987481058712786</c:v>
+                </c:pt>
+                <c:pt idx="30">
+                  <c:v>0.23043933933913263</c:v>
+                </c:pt>
+                <c:pt idx="31">
+                  <c:v>0.4764501224175387</c:v>
+                </c:pt>
+                <c:pt idx="32">
+                  <c:v>0.66634719055407621</c:v>
+                </c:pt>
+                <c:pt idx="33">
+                  <c:v>0.14657603038646094</c:v>
+                </c:pt>
+                <c:pt idx="34">
+                  <c:v>0.37505119416747879</c:v>
+                </c:pt>
+                <c:pt idx="35">
+                  <c:v>0.73810644562267336</c:v>
+                </c:pt>
+                <c:pt idx="36">
+                  <c:v>0.12403775778396497</c:v>
+                </c:pt>
+                <c:pt idx="37">
+                  <c:v>0.56130436459855815</c:v>
+                </c:pt>
+                <c:pt idx="38">
+                  <c:v>0.19977709395758303</c:v>
+                </c:pt>
+                <c:pt idx="39">
+                  <c:v>0.62755183805284731</c:v>
+                </c:pt>
+                <c:pt idx="40">
+                  <c:v>0.98890763892072608</c:v>
+                </c:pt>
+                <c:pt idx="41">
+                  <c:v>0.47704714511429613</c:v>
+                </c:pt>
+                <c:pt idx="42">
+                  <c:v>0.77011340822657759</c:v>
+                </c:pt>
+                <c:pt idx="43">
+                  <c:v>0.82037268492006876</c:v>
+                </c:pt>
+                <c:pt idx="44">
+                  <c:v>0.10729007419426073</c:v>
+                </c:pt>
+                <c:pt idx="45">
+                  <c:v>0.76677415381979341</c:v>
+                </c:pt>
+                <c:pt idx="46">
+                  <c:v>0.64014395526101275</c:v>
+                </c:pt>
+                <c:pt idx="47">
+                  <c:v>0.30173785282289245</c:v>
+                </c:pt>
+                <c:pt idx="48">
+                  <c:v>0.33701855989422691</c:v>
+                </c:pt>
+                <c:pt idx="49">
+                  <c:v>0.52481721238170276</c:v>
+                </c:pt>
+                <c:pt idx="50">
+                  <c:v>9.3329336455345913E-2</c:v>
+                </c:pt>
+                <c:pt idx="51">
+                  <c:v>0.19344654421549579</c:v>
+                </c:pt>
+                <c:pt idx="52">
+                  <c:v>0.51201365249169128</c:v>
+                </c:pt>
+                <c:pt idx="53">
+                  <c:v>0.67083560022535893</c:v>
+                </c:pt>
+                <c:pt idx="54">
+                  <c:v>0.78530252924259825</c:v>
+                </c:pt>
+                <c:pt idx="55">
+                  <c:v>0.19256990356461923</c:v>
+                </c:pt>
+                <c:pt idx="56">
+                  <c:v>0.42853992501045879</c:v>
+                </c:pt>
+                <c:pt idx="57">
+                  <c:v>0.64304012476867844</c:v>
+                </c:pt>
+                <c:pt idx="58">
+                  <c:v>0.10736630351338916</c:v>
+                </c:pt>
+                <c:pt idx="59">
+                  <c:v>0.42057322499562588</c:v>
+                </c:pt>
+                <c:pt idx="60">
+                  <c:v>0.84507915435845748</c:v>
+                </c:pt>
+                <c:pt idx="61">
+                  <c:v>0.80946323306168855</c:v>
+                </c:pt>
+                <c:pt idx="62">
+                  <c:v>0.88232427706804162</c:v>
+                </c:pt>
+                <c:pt idx="63">
+                  <c:v>0.60903829044500823</c:v>
+                </c:pt>
+                <c:pt idx="64">
+                  <c:v>0.68073104502990867</c:v>
+                </c:pt>
+                <c:pt idx="65">
+                  <c:v>0.4119016450907298</c:v>
+                </c:pt>
+                <c:pt idx="66">
+                  <c:v>0.67990635408201971</c:v>
+                </c:pt>
+                <c:pt idx="67">
+                  <c:v>0.46309354506506517</c:v>
+                </c:pt>
+                <c:pt idx="68">
+                  <c:v>0.52593769673901969</c:v>
+                </c:pt>
+                <c:pt idx="69">
+                  <c:v>0.36340476770304908</c:v>
+                </c:pt>
+                <c:pt idx="70">
+                  <c:v>0.46865713775346696</c:v>
+                </c:pt>
+                <c:pt idx="71">
+                  <c:v>0.36656636678060939</c:v>
+                </c:pt>
+                <c:pt idx="72">
+                  <c:v>0.76702999252715653</c:v>
+                </c:pt>
+                <c:pt idx="73">
+                  <c:v>0.10608267722379738</c:v>
+                </c:pt>
+                <c:pt idx="74">
+                  <c:v>0.30685710310743119</c:v>
+                </c:pt>
+                <c:pt idx="75">
+                  <c:v>0.18301409198963881</c:v>
+                </c:pt>
+                <c:pt idx="76">
+                  <c:v>2.1745835725347717E-2</c:v>
+                </c:pt>
+                <c:pt idx="77">
+                  <c:v>6.6266441985163071E-2</c:v>
+                </c:pt>
+                <c:pt idx="78">
+                  <c:v>0.41610602188317158</c:v>
+                </c:pt>
+                <c:pt idx="79">
+                  <c:v>3.418735086646929E-2</c:v>
+                </c:pt>
+                <c:pt idx="80">
+                  <c:v>0.10602366800677687</c:v>
+                </c:pt>
+                <c:pt idx="81">
+                  <c:v>0.89568375850576487</c:v>
+                </c:pt>
+                <c:pt idx="82">
+                  <c:v>2.9339080977853649E-2</c:v>
+                </c:pt>
+                <c:pt idx="83">
+                  <c:v>0.39969235041311302</c:v>
+                </c:pt>
+                <c:pt idx="84">
+                  <c:v>0.92847884540151115</c:v>
+                </c:pt>
+                <c:pt idx="85">
+                  <c:v>0.51759583451266744</c:v>
+                </c:pt>
+                <c:pt idx="86">
+                  <c:v>0.87865482807311424</c:v>
+                </c:pt>
+                <c:pt idx="87">
+                  <c:v>0.28596693352608205</c:v>
+                </c:pt>
+                <c:pt idx="88">
+                  <c:v>0.64044395932786757</c:v>
+                </c:pt>
+                <c:pt idx="89">
+                  <c:v>5.270114461111941E-2</c:v>
+                </c:pt>
+                <c:pt idx="90">
+                  <c:v>0.90168298731415575</c:v>
+                </c:pt>
+                <c:pt idx="91">
+                  <c:v>0.93309298424156761</c:v>
+                </c:pt>
+                <c:pt idx="92">
+                  <c:v>0.29159246307207198</c:v>
+                </c:pt>
+                <c:pt idx="93">
+                  <c:v>0.42483746065235151</c:v>
+                </c:pt>
+                <c:pt idx="94">
+                  <c:v>0.79899298020473986</c:v>
+                </c:pt>
+                <c:pt idx="95">
+                  <c:v>0.41028752264897073</c:v>
+                </c:pt>
+                <c:pt idx="96">
+                  <c:v>0.79244546294168206</c:v>
+                </c:pt>
+                <c:pt idx="97">
+                  <c:v>0.6726986577317664</c:v>
+                </c:pt>
+                <c:pt idx="98">
+                  <c:v>0.36512033555259982</c:v>
+                </c:pt>
+                <c:pt idx="99">
+                  <c:v>0.32938591686523888</c:v>
+                </c:pt>
+              </c:numCache>
+            </c:numRef>
+          </c:xVal>
+          <c:yVal>
+            <c:numRef>
+              <c:f>Sheet1!$B$2:$B$101</c:f>
+              <c:numCache>
+                <c:formatCode>General</c:formatCode>
+                <c:ptCount val="100"/>
+                <c:pt idx="0">
+                  <c:v>1.4000174112804196</c:v>
+                </c:pt>
+                <c:pt idx="1">
+                  <c:v>0.17401761429713769</c:v>
+                </c:pt>
+                <c:pt idx="2">
+                  <c:v>0.90516441492466948</c:v>
+                </c:pt>
+                <c:pt idx="3">
+                  <c:v>0.54457682544434738</c:v>
+                </c:pt>
+                <c:pt idx="4">
+                  <c:v>0.44408519589476603</c:v>
+                </c:pt>
+                <c:pt idx="5">
+                  <c:v>1.895980531512159</c:v>
+                </c:pt>
+                <c:pt idx="6">
+                  <c:v>1.8048467898141967</c:v>
+                </c:pt>
+                <c:pt idx="7">
+                  <c:v>1.8917668973897346</c:v>
+                </c:pt>
+                <c:pt idx="8">
+                  <c:v>1.4480375198909636</c:v>
+                </c:pt>
+                <c:pt idx="9">
+                  <c:v>0.8817440441755362</c:v>
+                </c:pt>
+                <c:pt idx="10">
+                  <c:v>1.4295146170888819</c:v>
+                </c:pt>
+                <c:pt idx="11">
+                  <c:v>0.71496801196194171</c:v>
+                </c:pt>
+                <c:pt idx="12">
+                  <c:v>0.89928977368783647</c:v>
+                </c:pt>
+                <c:pt idx="13">
+                  <c:v>1.0428396450296553</c:v>
+                </c:pt>
+                <c:pt idx="14">
+                  <c:v>1.0942767877250099</c:v>
+                </c:pt>
+                <c:pt idx="15">
+                  <c:v>0.73815646555336167</c:v>
+                </c:pt>
+                <c:pt idx="16">
+                  <c:v>0.97369313064861418</c:v>
+                </c:pt>
+                <c:pt idx="17">
+                  <c:v>0.30882353232265047</c:v>
+                </c:pt>
+                <c:pt idx="18">
+                  <c:v>0.71609727909196441</c:v>
+                </c:pt>
+                <c:pt idx="19">
+                  <c:v>0.9147748239274669</c:v>
+                </c:pt>
+                <c:pt idx="20">
+                  <c:v>0.46433950735201124</c:v>
+                </c:pt>
+                <c:pt idx="21">
+                  <c:v>0.45491159218723409</c:v>
+                </c:pt>
+                <c:pt idx="22">
+                  <c:v>0.8208553570136593</c:v>
+                </c:pt>
+                <c:pt idx="23">
+                  <c:v>1.1700395222295525</c:v>
+                </c:pt>
+                <c:pt idx="24">
+                  <c:v>0.52900876018202825</c:v>
+                </c:pt>
+                <c:pt idx="25">
+                  <c:v>0.54848538041089767</c:v>
+                </c:pt>
+                <c:pt idx="26">
+                  <c:v>0.86573705009065716</c:v>
+                </c:pt>
+                <c:pt idx="27">
+                  <c:v>0.83866799600067476</c:v>
+                </c:pt>
+                <c:pt idx="28">
+                  <c:v>0.62790307102139487</c:v>
+                </c:pt>
+                <c:pt idx="29">
+                  <c:v>1.173165827789576</c:v>
+                </c:pt>
+                <c:pt idx="30">
+                  <c:v>1.2185399134677546</c:v>
+                </c:pt>
+                <c:pt idx="31">
+                  <c:v>1.1510573427764415</c:v>
+                </c:pt>
+                <c:pt idx="32">
+                  <c:v>0.68639662135741208</c:v>
+                </c:pt>
+                <c:pt idx="33">
+                  <c:v>1.0938633196262348</c:v>
+                </c:pt>
+                <c:pt idx="34">
+                  <c:v>1.3711012970470318</c:v>
+                </c:pt>
+                <c:pt idx="35">
+                  <c:v>1.1268524354348575</c:v>
+                </c:pt>
+                <c:pt idx="36">
+                  <c:v>1.0689374941971743</c:v>
+                </c:pt>
+                <c:pt idx="37">
+                  <c:v>1.5557133087891184</c:v>
+                </c:pt>
+                <c:pt idx="38">
+                  <c:v>0.7384332360596928</c:v>
+                </c:pt>
+                <c:pt idx="39">
+                  <c:v>1.5351316557375907</c:v>
+                </c:pt>
+                <c:pt idx="40">
+                  <c:v>1.2406778615795222</c:v>
+                </c:pt>
+                <c:pt idx="41">
+                  <c:v>0.5516348423259172</c:v>
+                </c:pt>
+                <c:pt idx="42">
+                  <c:v>1.3676910210956823</c:v>
+                </c:pt>
+                <c:pt idx="43">
+                  <c:v>0.99925724389227533</c:v>
+                </c:pt>
+                <c:pt idx="44">
+                  <c:v>0.53403622544337292</c:v>
+                </c:pt>
+                <c:pt idx="45">
+                  <c:v>1.6192264039604614</c:v>
+                </c:pt>
+                <c:pt idx="46">
+                  <c:v>1.5294819849241352</c:v>
+                </c:pt>
+                <c:pt idx="47">
+                  <c:v>1.150317257863904</c:v>
+                </c:pt>
+                <c:pt idx="48">
+                  <c:v>0.7110025604519542</c:v>
+                </c:pt>
+                <c:pt idx="49">
+                  <c:v>1.5100104105037402</c:v>
+                </c:pt>
+                <c:pt idx="50">
+                  <c:v>0.78591510949089793</c:v>
+                </c:pt>
+                <c:pt idx="51">
+                  <c:v>0.40430217569124394</c:v>
+                </c:pt>
+                <c:pt idx="52">
+                  <c:v>0.95483473258632712</c:v>
+                </c:pt>
+                <c:pt idx="53">
+                  <c:v>0.77734540668520058</c:v>
+                </c:pt>
+                <c:pt idx="54">
+                  <c:v>0.86973858113340452</c:v>
+                </c:pt>
+                <c:pt idx="55">
+                  <c:v>0.71674038841727117</c:v>
+                </c:pt>
+                <c:pt idx="56">
+                  <c:v>1.299039685146409</c:v>
+                </c:pt>
+                <c:pt idx="57">
+                  <c:v>0.79042393096777785</c:v>
+                </c:pt>
+                <c:pt idx="58">
+                  <c:v>0.98680502400153114</c:v>
+                </c:pt>
+                <c:pt idx="59">
+                  <c:v>1.0884477598454656</c:v>
+                </c:pt>
+                <c:pt idx="60">
+                  <c:v>1.3141808961237849</c:v>
+                </c:pt>
+                <c:pt idx="61">
+                  <c:v>1.5535459454563805</c:v>
+                </c:pt>
+                <c:pt idx="62">
+                  <c:v>1.5247737899571172</c:v>
+                </c:pt>
+                <c:pt idx="63">
+                  <c:v>0.71943943396054455</c:v>
+                </c:pt>
+                <c:pt idx="64">
+                  <c:v>1.6488797489310207</c:v>
+                </c:pt>
+                <c:pt idx="65">
+                  <c:v>1.4087734242840386</c:v>
+                </c:pt>
+                <c:pt idx="66">
+                  <c:v>1.0319473581537173</c:v>
+                </c:pt>
+                <c:pt idx="67">
+                  <c:v>1.3719348410837759</c:v>
+                </c:pt>
+                <c:pt idx="68">
+                  <c:v>0.87792507640886441</c:v>
+                </c:pt>
+                <c:pt idx="69">
+                  <c:v>0.63291793930546181</c:v>
+                </c:pt>
+                <c:pt idx="70">
+                  <c:v>0.56654675081247841</c:v>
+                </c:pt>
+                <c:pt idx="71">
+                  <c:v>0.39572072838969941</c:v>
+                </c:pt>
+                <c:pt idx="72">
+                  <c:v>1.2552343043665051</c:v>
+                </c:pt>
+                <c:pt idx="73">
+                  <c:v>0.19256955795654263</c:v>
+                </c:pt>
+                <c:pt idx="74">
+                  <c:v>0.32938109894162171</c:v>
+                </c:pt>
+                <c:pt idx="75">
+                  <c:v>0.32640957533737691</c:v>
+                </c:pt>
+                <c:pt idx="76">
+                  <c:v>0.12427302810933771</c:v>
+                </c:pt>
+                <c:pt idx="77">
+                  <c:v>0.14535867035008909</c:v>
+                </c:pt>
+                <c:pt idx="78">
+                  <c:v>0.62684795889935241</c:v>
+                </c:pt>
+                <c:pt idx="79">
+                  <c:v>0.79912876874703109</c:v>
+                </c:pt>
+                <c:pt idx="80">
+                  <c:v>0.69847926593413612</c:v>
+                </c:pt>
+                <c:pt idx="81">
+                  <c:v>1.8944778328678182</c:v>
+                </c:pt>
+                <c:pt idx="82">
+                  <c:v>0.59390466343551063</c:v>
+                </c:pt>
+                <c:pt idx="83">
+                  <c:v>0.67141633877155549</c:v>
+                </c:pt>
+                <c:pt idx="84">
+                  <c:v>1.2562006988313474</c:v>
+                </c:pt>
+                <c:pt idx="85">
+                  <c:v>1.2301080981624146</c:v>
+                </c:pt>
+                <c:pt idx="86">
+                  <c:v>1.4114848128381476</c:v>
+                </c:pt>
+                <c:pt idx="87">
+                  <c:v>0.59497912740283476</c:v>
+                </c:pt>
+                <c:pt idx="88">
+                  <c:v>1.3004428661404046</c:v>
+                </c:pt>
+                <c:pt idx="89">
+                  <c:v>0.59922337088154165</c:v>
+                </c:pt>
+                <c:pt idx="90">
+                  <c:v>1.8285432771890544</c:v>
+                </c:pt>
+                <c:pt idx="91">
+                  <c:v>1.0502178421694084</c:v>
+                </c:pt>
+                <c:pt idx="92">
+                  <c:v>1.1322054833175637</c:v>
+                </c:pt>
+                <c:pt idx="93">
+                  <c:v>1.0878466860235556</c:v>
+                </c:pt>
+                <c:pt idx="94">
+                  <c:v>1.6264809375587714</c:v>
+                </c:pt>
+                <c:pt idx="95">
+                  <c:v>1.1718036544834294</c:v>
+                </c:pt>
+                <c:pt idx="96">
+                  <c:v>0.86778128542654798</c:v>
+                </c:pt>
+                <c:pt idx="97">
+                  <c:v>1.2132979954472831</c:v>
+                </c:pt>
+                <c:pt idx="98">
+                  <c:v>0.80462632213024532</c:v>
+                </c:pt>
+                <c:pt idx="99">
+                  <c:v>1.1463671866064602</c:v>
+                </c:pt>
+              </c:numCache>
+            </c:numRef>
+          </c:yVal>
+          <c:smooth val="0"/>
+          <c:extLst>
+            <c:ext xmlns:c16="http://schemas.microsoft.com/office/drawing/2014/chart" uri="{C3380CC4-5D6E-409C-BE32-E72D297353CC}">
+              <c16:uniqueId val="{00000001-367F-4852-8BDF-083823318337}"/>
+            </c:ext>
+          </c:extLst>
+        </c:ser>
+        <c:dLbls>
+          <c:showLegendKey val="0"/>
+          <c:showVal val="0"/>
+          <c:showCatName val="0"/>
+          <c:showSerName val="0"/>
+          <c:showPercent val="0"/>
+          <c:showBubbleSize val="0"/>
+        </c:dLbls>
+        <c:axId val="1154596832"/>
+        <c:axId val="1154594864"/>
+      </c:scatterChart>
+      <c:valAx>
+        <c:axId val="1154596832"/>
+        <c:scaling>
+          <c:orientation val="minMax"/>
+          <c:max val="1"/>
+        </c:scaling>
+        <c:delete val="1"/>
+        <c:axPos val="b"/>
+        <c:numFmt formatCode="General" sourceLinked="1"/>
+        <c:majorTickMark val="out"/>
+        <c:minorTickMark val="none"/>
+        <c:tickLblPos val="nextTo"/>
+        <c:crossAx val="1154594864"/>
+        <c:crosses val="autoZero"/>
+        <c:crossBetween val="midCat"/>
+      </c:valAx>
+      <c:valAx>
+        <c:axId val="1154594864"/>
+        <c:scaling>
+          <c:orientation val="minMax"/>
+        </c:scaling>
+        <c:delete val="1"/>
+        <c:axPos val="l"/>
+        <c:numFmt formatCode="General" sourceLinked="1"/>
+        <c:majorTickMark val="none"/>
+        <c:minorTickMark val="none"/>
+        <c:tickLblPos val="nextTo"/>
+        <c:crossAx val="1154596832"/>
+        <c:crosses val="autoZero"/>
+        <c:crossBetween val="midCat"/>
+      </c:valAx>
+      <c:spPr>
+        <a:noFill/>
+        <a:ln>
+          <a:noFill/>
+        </a:ln>
+        <a:effectLst/>
+      </c:spPr>
+    </c:plotArea>
+    <c:plotVisOnly val="1"/>
+    <c:dispBlanksAs val="gap"/>
+    <c:showDLblsOverMax val="0"/>
+  </c:chart>
+  <c:spPr>
+    <a:noFill/>
+    <a:ln>
+      <a:noFill/>
+    </a:ln>
+    <a:effectLst/>
+  </c:spPr>
+  <c:txPr>
+    <a:bodyPr/>
+    <a:lstStyle/>
+    <a:p>
+      <a:pPr>
+        <a:defRPr/>
+      </a:pPr>
+      <a:endParaRPr lang="ja-JP"/>
+    </a:p>
+  </c:txPr>
+  <c:externalData r:id="rId3">
+    <c:autoUpdate val="0"/>
+  </c:externalData>
+</c:chartSpace>
+</file>
+
+<file path=ppt/charts/chart2.xml><?xml version="1.0" encoding="utf-8"?>
+<c:chartSpace xmlns:c="http://schemas.openxmlformats.org/drawingml/2006/chart" xmlns:a="http://schemas.openxmlformats.org/drawingml/2006/main" xmlns:r="http://schemas.openxmlformats.org/officeDocument/2006/relationships" xmlns:c16r2="http://schemas.microsoft.com/office/drawing/2015/06/chart">
+  <c:date1904 val="0"/>
+  <c:lang val="ja-JP"/>
+  <c:roundedCorners val="0"/>
+  <mc:AlternateContent xmlns:mc="http://schemas.openxmlformats.org/markup-compatibility/2006">
+    <mc:Choice xmlns:c14="http://schemas.microsoft.com/office/drawing/2007/8/2/chart" Requires="c14">
+      <c14:style val="102"/>
+    </mc:Choice>
+    <mc:Fallback>
+      <c:style val="2"/>
+    </mc:Fallback>
+  </mc:AlternateContent>
+  <c:chart>
+    <c:autoTitleDeleted val="0"/>
+    <c:plotArea>
+      <c:layout/>
+      <c:scatterChart>
+        <c:scatterStyle val="lineMarker"/>
+        <c:varyColors val="0"/>
+        <c:ser>
+          <c:idx val="0"/>
+          <c:order val="0"/>
+          <c:tx>
+            <c:strRef>
+              <c:f>Sheet1!$B$1</c:f>
+              <c:strCache>
+                <c:ptCount val="1"/>
+                <c:pt idx="0">
+                  <c:v>Y の値</c:v>
+                </c:pt>
+              </c:strCache>
+            </c:strRef>
+          </c:tx>
+          <c:spPr>
+            <a:ln w="25400" cap="rnd">
+              <a:noFill/>
+              <a:round/>
+            </a:ln>
+            <a:effectLst/>
+          </c:spPr>
+          <c:marker>
+            <c:symbol val="circle"/>
+            <c:size val="5"/>
+            <c:spPr>
+              <a:solidFill>
+                <a:schemeClr val="accent1"/>
+              </a:solidFill>
+              <a:ln w="9525">
+                <a:solidFill>
+                  <a:schemeClr val="accent1"/>
+                </a:solidFill>
+              </a:ln>
+              <a:effectLst/>
+            </c:spPr>
+          </c:marker>
+          <c:trendline>
+            <c:spPr>
+              <a:ln w="19050" cap="rnd">
+                <a:solidFill>
+                  <a:schemeClr val="accent1"/>
+                </a:solidFill>
+                <a:prstDash val="sysDot"/>
+              </a:ln>
+              <a:effectLst/>
+            </c:spPr>
+            <c:trendlineType val="linear"/>
+            <c:dispRSqr val="0"/>
+            <c:dispEq val="0"/>
+          </c:trendline>
+          <c:trendline>
+            <c:spPr>
+              <a:ln w="19050" cap="rnd">
+                <a:solidFill>
+                  <a:schemeClr val="accent1"/>
+                </a:solidFill>
+                <a:prstDash val="sysDot"/>
+              </a:ln>
+              <a:effectLst/>
+            </c:spPr>
+            <c:trendlineType val="linear"/>
+            <c:dispRSqr val="0"/>
+            <c:dispEq val="0"/>
+          </c:trendline>
+          <c:xVal>
+            <c:numRef>
+              <c:f>Sheet1!$A$2:$A$101</c:f>
+              <c:numCache>
+                <c:formatCode>General</c:formatCode>
+                <c:ptCount val="100"/>
+                <c:pt idx="0">
+                  <c:v>9.6470343950330051E-2</c:v>
+                </c:pt>
+                <c:pt idx="1">
+                  <c:v>0.18152554341423799</c:v>
+                </c:pt>
+                <c:pt idx="2">
+                  <c:v>0.86635348566883674</c:v>
+                </c:pt>
+                <c:pt idx="3">
+                  <c:v>0.7281207630364932</c:v>
+                </c:pt>
+                <c:pt idx="4">
+                  <c:v>0.91292170620974844</c:v>
+                </c:pt>
+                <c:pt idx="5">
+                  <c:v>0.82657647356240271</c:v>
+                </c:pt>
+                <c:pt idx="6">
+                  <c:v>0.83909913084616927</c:v>
+                </c:pt>
+                <c:pt idx="7">
+                  <c:v>0.75433053870169198</c:v>
+                </c:pt>
+                <c:pt idx="8">
+                  <c:v>0.25753530177090078</c:v>
+                </c:pt>
+                <c:pt idx="9">
+                  <c:v>0.41834734479868241</c:v>
+                </c:pt>
+                <c:pt idx="10">
+                  <c:v>0.57783359328001094</c:v>
+                </c:pt>
+                <c:pt idx="11">
+                  <c:v>0.29341969526667822</c:v>
+                </c:pt>
+                <c:pt idx="12">
+                  <c:v>0.20351638059145205</c:v>
+                </c:pt>
+                <c:pt idx="13">
+                  <c:v>0.67810043732793723</c:v>
+                </c:pt>
+                <c:pt idx="14">
+                  <c:v>0.56011997723303886</c:v>
+                </c:pt>
+                <c:pt idx="15">
+                  <c:v>0.75803908517751994</c:v>
+                </c:pt>
+                <c:pt idx="16">
+                  <c:v>0.31558213892240417</c:v>
+                </c:pt>
+                <c:pt idx="17">
+                  <c:v>0.42614194823094664</c:v>
+                </c:pt>
+                <c:pt idx="18">
+                  <c:v>0.72713164392212226</c:v>
+                </c:pt>
+                <c:pt idx="19">
+                  <c:v>0.70365413228586315</c:v>
+                </c:pt>
+                <c:pt idx="20">
+                  <c:v>0.3921570379871413</c:v>
+                </c:pt>
+                <c:pt idx="21">
+                  <c:v>3.1260805531966529E-2</c:v>
+                </c:pt>
+                <c:pt idx="22">
+                  <c:v>0.20912499123229755</c:v>
+                </c:pt>
+                <c:pt idx="23">
+                  <c:v>0.84449989926342861</c:v>
+                </c:pt>
+                <c:pt idx="24">
+                  <c:v>0.13293840672859891</c:v>
+                </c:pt>
+                <c:pt idx="25">
+                  <c:v>0.56247083138819332</c:v>
+                </c:pt>
+                <c:pt idx="26">
+                  <c:v>0.18916188007602741</c:v>
+                </c:pt>
+                <c:pt idx="27">
+                  <c:v>0.26119518145387033</c:v>
+                </c:pt>
+                <c:pt idx="28">
+                  <c:v>0.62256216747625936</c:v>
+                </c:pt>
+                <c:pt idx="29">
+                  <c:v>0.16142972305215209</c:v>
+                </c:pt>
+                <c:pt idx="30">
+                  <c:v>0.97637553817412903</c:v>
+                </c:pt>
+                <c:pt idx="31">
+                  <c:v>0.5130118454086009</c:v>
+                </c:pt>
+                <c:pt idx="32">
+                  <c:v>0.68975888803237106</c:v>
+                </c:pt>
+                <c:pt idx="33">
+                  <c:v>0.2929640684497844</c:v>
+                </c:pt>
+                <c:pt idx="34">
+                  <c:v>0.23658417644666974</c:v>
+                </c:pt>
+                <c:pt idx="35">
+                  <c:v>0.4040592298786031</c:v>
+                </c:pt>
+                <c:pt idx="36">
+                  <c:v>0.95846628795470334</c:v>
+                </c:pt>
+                <c:pt idx="37">
+                  <c:v>0.39149883534577956</c:v>
+                </c:pt>
+                <c:pt idx="38">
+                  <c:v>0.82931297803995641</c:v>
+                </c:pt>
+                <c:pt idx="39">
+                  <c:v>0.85162343829931042</c:v>
+                </c:pt>
+                <c:pt idx="40">
+                  <c:v>0.48483804582771839</c:v>
+                </c:pt>
+                <c:pt idx="41">
+                  <c:v>0.17121722472920342</c:v>
+                </c:pt>
+                <c:pt idx="42">
+                  <c:v>3.1654775968890325E-2</c:v>
+                </c:pt>
+                <c:pt idx="43">
+                  <c:v>0.22411844429325545</c:v>
+                </c:pt>
+                <c:pt idx="44">
+                  <c:v>0.22660915009788007</c:v>
+                </c:pt>
+                <c:pt idx="45">
+                  <c:v>0.85242963107783609</c:v>
+                </c:pt>
+                <c:pt idx="46">
+                  <c:v>0.31250053463663097</c:v>
+                </c:pt>
+                <c:pt idx="47">
+                  <c:v>0.25747520037293492</c:v>
+                </c:pt>
+                <c:pt idx="48">
+                  <c:v>0.70988823831598935</c:v>
+                </c:pt>
+                <c:pt idx="49">
+                  <c:v>0.83197836892030008</c:v>
+                </c:pt>
+                <c:pt idx="50">
+                  <c:v>0.72905092697913965</c:v>
+                </c:pt>
+                <c:pt idx="51">
+                  <c:v>0.69825701942684026</c:v>
+                </c:pt>
+                <c:pt idx="52">
+                  <c:v>0.82154104139284978</c:v>
+                </c:pt>
+                <c:pt idx="53">
+                  <c:v>0.4462243443071553</c:v>
+                </c:pt>
+                <c:pt idx="54">
+                  <c:v>0.72327349074166647</c:v>
+                </c:pt>
+                <c:pt idx="55">
+                  <c:v>0.34462690808809404</c:v>
+                </c:pt>
+                <c:pt idx="56">
+                  <c:v>0.5654058830679014</c:v>
+                </c:pt>
+                <c:pt idx="57">
+                  <c:v>0.843850549901078</c:v>
+                </c:pt>
+                <c:pt idx="58">
+                  <c:v>0.14899165597013475</c:v>
+                </c:pt>
+                <c:pt idx="59">
+                  <c:v>0.63636970843838536</c:v>
+                </c:pt>
+                <c:pt idx="60">
+                  <c:v>0.84147371572829666</c:v>
+                </c:pt>
+                <c:pt idx="61">
+                  <c:v>0.52563918524907582</c:v>
+                </c:pt>
+                <c:pt idx="62">
+                  <c:v>0.57252723002008898</c:v>
+                </c:pt>
+                <c:pt idx="63">
+                  <c:v>0.3284908267246025</c:v>
+                </c:pt>
+                <c:pt idx="64">
+                  <c:v>0.84627210143921228</c:v>
+                </c:pt>
+                <c:pt idx="65">
+                  <c:v>0.11006862565068243</c:v>
+                </c:pt>
+                <c:pt idx="66">
+                  <c:v>9.7344522711709902E-2</c:v>
+                </c:pt>
+                <c:pt idx="67">
+                  <c:v>0.26485516370510653</c:v>
+                </c:pt>
+                <c:pt idx="68">
+                  <c:v>0.25996621170291312</c:v>
+                </c:pt>
+                <c:pt idx="69">
+                  <c:v>0.31563457284138141</c:v>
+                </c:pt>
+                <c:pt idx="70">
+                  <c:v>0.22840327881884825</c:v>
+                </c:pt>
+                <c:pt idx="71">
+                  <c:v>0.13163126876964515</c:v>
+                </c:pt>
+                <c:pt idx="72">
+                  <c:v>0.50687575074499502</c:v>
+                </c:pt>
+                <c:pt idx="73">
+                  <c:v>0.82684503756849015</c:v>
+                </c:pt>
+                <c:pt idx="74">
+                  <c:v>8.5853198536488096E-2</c:v>
+                </c:pt>
+                <c:pt idx="75">
+                  <c:v>7.809158368851099E-4</c:v>
+                </c:pt>
+                <c:pt idx="76">
+                  <c:v>0.848103671813905</c:v>
+                </c:pt>
+                <c:pt idx="77">
+                  <c:v>0.37043308728876256</c:v>
+                </c:pt>
+                <c:pt idx="78">
+                  <c:v>0.13260448087497989</c:v>
+                </c:pt>
+                <c:pt idx="79">
+                  <c:v>0.86637808613961886</c:v>
+                </c:pt>
+                <c:pt idx="80">
+                  <c:v>7.5079734103044249E-2</c:v>
+                </c:pt>
+                <c:pt idx="81">
+                  <c:v>0.51765391901880342</c:v>
+                </c:pt>
+                <c:pt idx="82">
+                  <c:v>0.58642083846470838</c:v>
+                </c:pt>
+                <c:pt idx="83">
+                  <c:v>0.62351081480128356</c:v>
+                </c:pt>
+                <c:pt idx="84">
+                  <c:v>0.8954581167918948</c:v>
+                </c:pt>
+                <c:pt idx="85">
+                  <c:v>0.63709289756743248</c:v>
+                </c:pt>
+                <c:pt idx="86">
+                  <c:v>0.89212164072896338</c:v>
+                </c:pt>
+                <c:pt idx="87">
+                  <c:v>7.7650350759048137E-2</c:v>
+                </c:pt>
+                <c:pt idx="88">
+                  <c:v>0.79244199163333739</c:v>
+                </c:pt>
+                <c:pt idx="89">
+                  <c:v>0.77429032293483135</c:v>
+                </c:pt>
+                <c:pt idx="90">
+                  <c:v>0.550026602161656</c:v>
+                </c:pt>
+                <c:pt idx="91">
+                  <c:v>0.71983374807432066</c:v>
+                </c:pt>
+                <c:pt idx="92">
+                  <c:v>0.32954168823862806</c:v>
+                </c:pt>
+                <c:pt idx="93">
+                  <c:v>0.51159832049362453</c:v>
+                </c:pt>
+                <c:pt idx="94">
+                  <c:v>0.33050222484370706</c:v>
+                </c:pt>
+                <c:pt idx="95">
+                  <c:v>0.27400595178197051</c:v>
+                </c:pt>
+                <c:pt idx="96">
+                  <c:v>0.73389523043941363</c:v>
+                </c:pt>
+                <c:pt idx="97">
+                  <c:v>0.17667324790850947</c:v>
+                </c:pt>
+                <c:pt idx="98">
+                  <c:v>0.75796198803494619</c:v>
+                </c:pt>
+                <c:pt idx="99">
+                  <c:v>0.81642215346599023</c:v>
+                </c:pt>
+              </c:numCache>
+            </c:numRef>
+          </c:xVal>
+          <c:yVal>
+            <c:numRef>
+              <c:f>Sheet1!#REF!</c:f>
+              <c:numCache>
+                <c:formatCode>General</c:formatCode>
+                <c:ptCount val="1"/>
+                <c:pt idx="0">
+                  <c:v>1</c:v>
+                </c:pt>
+              </c:numCache>
+            </c:numRef>
+          </c:yVal>
+          <c:smooth val="0"/>
+          <c:extLst>
+            <c:ext xmlns:c16="http://schemas.microsoft.com/office/drawing/2014/chart" uri="{C3380CC4-5D6E-409C-BE32-E72D297353CC}">
+              <c16:uniqueId val="{00000002-40CE-4D48-90B0-9C4F6EB66D2E}"/>
+            </c:ext>
+          </c:extLst>
+        </c:ser>
+        <c:ser>
+          <c:idx val="1"/>
+          <c:order val="1"/>
+          <c:tx>
+            <c:strRef>
+              <c:f>Sheet1!$C$1</c:f>
+              <c:strCache>
+                <c:ptCount val="1"/>
+                <c:pt idx="0">
+                  <c:v>列1</c:v>
+                </c:pt>
+              </c:strCache>
+            </c:strRef>
+          </c:tx>
+          <c:spPr>
+            <a:ln w="25400" cap="rnd">
+              <a:noFill/>
+              <a:round/>
+            </a:ln>
+            <a:effectLst/>
+          </c:spPr>
+          <c:marker>
+            <c:symbol val="circle"/>
+            <c:size val="5"/>
+            <c:spPr>
+              <a:solidFill>
+                <a:schemeClr val="accent2"/>
+              </a:solidFill>
+              <a:ln w="9525">
+                <a:solidFill>
+                  <a:schemeClr val="accent2"/>
+                </a:solidFill>
+              </a:ln>
+              <a:effectLst/>
+            </c:spPr>
+          </c:marker>
+          <c:trendline>
+            <c:spPr>
+              <a:ln w="19050" cap="rnd">
+                <a:solidFill>
+                  <a:schemeClr val="accent2"/>
+                </a:solidFill>
+                <a:prstDash val="sysDot"/>
+              </a:ln>
+              <a:effectLst/>
+            </c:spPr>
+            <c:trendlineType val="linear"/>
+            <c:dispRSqr val="0"/>
+            <c:dispEq val="0"/>
+          </c:trendline>
+          <c:xVal>
+            <c:numRef>
+              <c:f>Sheet1!$A$2:$A$101</c:f>
+              <c:numCache>
+                <c:formatCode>General</c:formatCode>
+                <c:ptCount val="100"/>
+                <c:pt idx="0">
+                  <c:v>9.6470343950330051E-2</c:v>
+                </c:pt>
+                <c:pt idx="1">
+                  <c:v>0.18152554341423799</c:v>
+                </c:pt>
+                <c:pt idx="2">
+                  <c:v>0.86635348566883674</c:v>
+                </c:pt>
+                <c:pt idx="3">
+                  <c:v>0.7281207630364932</c:v>
+                </c:pt>
+                <c:pt idx="4">
+                  <c:v>0.91292170620974844</c:v>
+                </c:pt>
+                <c:pt idx="5">
+                  <c:v>0.82657647356240271</c:v>
+                </c:pt>
+                <c:pt idx="6">
+                  <c:v>0.83909913084616927</c:v>
+                </c:pt>
+                <c:pt idx="7">
+                  <c:v>0.75433053870169198</c:v>
+                </c:pt>
+                <c:pt idx="8">
+                  <c:v>0.25753530177090078</c:v>
+                </c:pt>
+                <c:pt idx="9">
+                  <c:v>0.41834734479868241</c:v>
+                </c:pt>
+                <c:pt idx="10">
+                  <c:v>0.57783359328001094</c:v>
+                </c:pt>
+                <c:pt idx="11">
+                  <c:v>0.29341969526667822</c:v>
+                </c:pt>
+                <c:pt idx="12">
+                  <c:v>0.20351638059145205</c:v>
+                </c:pt>
+                <c:pt idx="13">
+                  <c:v>0.67810043732793723</c:v>
+                </c:pt>
+                <c:pt idx="14">
+                  <c:v>0.56011997723303886</c:v>
+                </c:pt>
+                <c:pt idx="15">
+                  <c:v>0.75803908517751994</c:v>
+                </c:pt>
+                <c:pt idx="16">
+                  <c:v>0.31558213892240417</c:v>
+                </c:pt>
+                <c:pt idx="17">
+                  <c:v>0.42614194823094664</c:v>
+                </c:pt>
+                <c:pt idx="18">
+                  <c:v>0.72713164392212226</c:v>
+                </c:pt>
+                <c:pt idx="19">
+                  <c:v>0.70365413228586315</c:v>
+                </c:pt>
+                <c:pt idx="20">
+                  <c:v>0.3921570379871413</c:v>
+                </c:pt>
+                <c:pt idx="21">
+                  <c:v>3.1260805531966529E-2</c:v>
+                </c:pt>
+                <c:pt idx="22">
+                  <c:v>0.20912499123229755</c:v>
+                </c:pt>
+                <c:pt idx="23">
+                  <c:v>0.84449989926342861</c:v>
+                </c:pt>
+                <c:pt idx="24">
+                  <c:v>0.13293840672859891</c:v>
+                </c:pt>
+                <c:pt idx="25">
+                  <c:v>0.56247083138819332</c:v>
+                </c:pt>
+                <c:pt idx="26">
+                  <c:v>0.18916188007602741</c:v>
+                </c:pt>
+                <c:pt idx="27">
+                  <c:v>0.26119518145387033</c:v>
+                </c:pt>
+                <c:pt idx="28">
+                  <c:v>0.62256216747625936</c:v>
+                </c:pt>
+                <c:pt idx="29">
+                  <c:v>0.16142972305215209</c:v>
+                </c:pt>
+                <c:pt idx="30">
+                  <c:v>0.97637553817412903</c:v>
+                </c:pt>
+                <c:pt idx="31">
+                  <c:v>0.5130118454086009</c:v>
+                </c:pt>
+                <c:pt idx="32">
+                  <c:v>0.68975888803237106</c:v>
+                </c:pt>
+                <c:pt idx="33">
+                  <c:v>0.2929640684497844</c:v>
+                </c:pt>
+                <c:pt idx="34">
+                  <c:v>0.23658417644666974</c:v>
+                </c:pt>
+                <c:pt idx="35">
+                  <c:v>0.4040592298786031</c:v>
+                </c:pt>
+                <c:pt idx="36">
+                  <c:v>0.95846628795470334</c:v>
+                </c:pt>
+                <c:pt idx="37">
+                  <c:v>0.39149883534577956</c:v>
+                </c:pt>
+                <c:pt idx="38">
+                  <c:v>0.82931297803995641</c:v>
+                </c:pt>
+                <c:pt idx="39">
+                  <c:v>0.85162343829931042</c:v>
+                </c:pt>
+                <c:pt idx="40">
+                  <c:v>0.48483804582771839</c:v>
+                </c:pt>
+                <c:pt idx="41">
+                  <c:v>0.17121722472920342</c:v>
+                </c:pt>
+                <c:pt idx="42">
+                  <c:v>3.1654775968890325E-2</c:v>
+                </c:pt>
+                <c:pt idx="43">
+                  <c:v>0.22411844429325545</c:v>
+                </c:pt>
+                <c:pt idx="44">
+                  <c:v>0.22660915009788007</c:v>
+                </c:pt>
+                <c:pt idx="45">
+                  <c:v>0.85242963107783609</c:v>
+                </c:pt>
+                <c:pt idx="46">
+                  <c:v>0.31250053463663097</c:v>
+                </c:pt>
+                <c:pt idx="47">
+                  <c:v>0.25747520037293492</c:v>
+                </c:pt>
+                <c:pt idx="48">
+                  <c:v>0.70988823831598935</c:v>
+                </c:pt>
+                <c:pt idx="49">
+                  <c:v>0.83197836892030008</c:v>
+                </c:pt>
+                <c:pt idx="50">
+                  <c:v>0.72905092697913965</c:v>
+                </c:pt>
+                <c:pt idx="51">
+                  <c:v>0.69825701942684026</c:v>
+                </c:pt>
+                <c:pt idx="52">
+                  <c:v>0.82154104139284978</c:v>
+                </c:pt>
+                <c:pt idx="53">
+                  <c:v>0.4462243443071553</c:v>
+                </c:pt>
+                <c:pt idx="54">
+                  <c:v>0.72327349074166647</c:v>
+                </c:pt>
+                <c:pt idx="55">
+                  <c:v>0.34462690808809404</c:v>
+                </c:pt>
+                <c:pt idx="56">
+                  <c:v>0.5654058830679014</c:v>
+                </c:pt>
+                <c:pt idx="57">
+                  <c:v>0.843850549901078</c:v>
+                </c:pt>
+                <c:pt idx="58">
+                  <c:v>0.14899165597013475</c:v>
+                </c:pt>
+                <c:pt idx="59">
+                  <c:v>0.63636970843838536</c:v>
+                </c:pt>
+                <c:pt idx="60">
+                  <c:v>0.84147371572829666</c:v>
+                </c:pt>
+                <c:pt idx="61">
+                  <c:v>0.52563918524907582</c:v>
+                </c:pt>
+                <c:pt idx="62">
+                  <c:v>0.57252723002008898</c:v>
+                </c:pt>
+                <c:pt idx="63">
+                  <c:v>0.3284908267246025</c:v>
+                </c:pt>
+                <c:pt idx="64">
+                  <c:v>0.84627210143921228</c:v>
+                </c:pt>
+                <c:pt idx="65">
+                  <c:v>0.11006862565068243</c:v>
+                </c:pt>
+                <c:pt idx="66">
+                  <c:v>9.7344522711709902E-2</c:v>
+                </c:pt>
+                <c:pt idx="67">
+                  <c:v>0.26485516370510653</c:v>
+                </c:pt>
+                <c:pt idx="68">
+                  <c:v>0.25996621170291312</c:v>
+                </c:pt>
+                <c:pt idx="69">
+                  <c:v>0.31563457284138141</c:v>
+                </c:pt>
+                <c:pt idx="70">
+                  <c:v>0.22840327881884825</c:v>
+                </c:pt>
+                <c:pt idx="71">
+                  <c:v>0.13163126876964515</c:v>
+                </c:pt>
+                <c:pt idx="72">
+                  <c:v>0.50687575074499502</c:v>
+                </c:pt>
+                <c:pt idx="73">
+                  <c:v>0.82684503756849015</c:v>
+                </c:pt>
+                <c:pt idx="74">
+                  <c:v>8.5853198536488096E-2</c:v>
+                </c:pt>
+                <c:pt idx="75">
+                  <c:v>7.809158368851099E-4</c:v>
+                </c:pt>
+                <c:pt idx="76">
+                  <c:v>0.848103671813905</c:v>
+                </c:pt>
+                <c:pt idx="77">
+                  <c:v>0.37043308728876256</c:v>
+                </c:pt>
+                <c:pt idx="78">
+                  <c:v>0.13260448087497989</c:v>
+                </c:pt>
+                <c:pt idx="79">
+                  <c:v>0.86637808613961886</c:v>
+                </c:pt>
+                <c:pt idx="80">
+                  <c:v>7.5079734103044249E-2</c:v>
+                </c:pt>
+                <c:pt idx="81">
+                  <c:v>0.51765391901880342</c:v>
+                </c:pt>
+                <c:pt idx="82">
+                  <c:v>0.58642083846470838</c:v>
+                </c:pt>
+                <c:pt idx="83">
+                  <c:v>0.62351081480128356</c:v>
+                </c:pt>
+                <c:pt idx="84">
+                  <c:v>0.8954581167918948</c:v>
+                </c:pt>
+                <c:pt idx="85">
+                  <c:v>0.63709289756743248</c:v>
+                </c:pt>
+                <c:pt idx="86">
+                  <c:v>0.89212164072896338</c:v>
+                </c:pt>
+                <c:pt idx="87">
+                  <c:v>7.7650350759048137E-2</c:v>
+                </c:pt>
+                <c:pt idx="88">
+                  <c:v>0.79244199163333739</c:v>
+                </c:pt>
+                <c:pt idx="89">
+                  <c:v>0.77429032293483135</c:v>
+                </c:pt>
+                <c:pt idx="90">
+                  <c:v>0.550026602161656</c:v>
+                </c:pt>
+                <c:pt idx="91">
+                  <c:v>0.71983374807432066</c:v>
+                </c:pt>
+                <c:pt idx="92">
+                  <c:v>0.32954168823862806</c:v>
+                </c:pt>
+                <c:pt idx="93">
+                  <c:v>0.51159832049362453</c:v>
+                </c:pt>
+                <c:pt idx="94">
+                  <c:v>0.33050222484370706</c:v>
+                </c:pt>
+                <c:pt idx="95">
+                  <c:v>0.27400595178197051</c:v>
+                </c:pt>
+                <c:pt idx="96">
+                  <c:v>0.73389523043941363</c:v>
+                </c:pt>
+                <c:pt idx="97">
+                  <c:v>0.17667324790850947</c:v>
+                </c:pt>
+                <c:pt idx="98">
+                  <c:v>0.75796198803494619</c:v>
+                </c:pt>
+                <c:pt idx="99">
+                  <c:v>0.81642215346599023</c:v>
+                </c:pt>
+              </c:numCache>
+            </c:numRef>
+          </c:xVal>
+          <c:yVal>
+            <c:numRef>
+              <c:f>Sheet1!$B$2:$B$101</c:f>
+              <c:numCache>
+                <c:formatCode>General</c:formatCode>
+                <c:ptCount val="100"/>
+                <c:pt idx="0">
+                  <c:v>0.2270768205662288</c:v>
+                </c:pt>
+                <c:pt idx="1">
+                  <c:v>-2.8001037408571405E-2</c:v>
+                </c:pt>
+                <c:pt idx="2">
+                  <c:v>-0.7890891783458599</c:v>
+                </c:pt>
+                <c:pt idx="3">
+                  <c:v>5.6292889284777714E-2</c:v>
+                </c:pt>
+                <c:pt idx="4">
+                  <c:v>-0.21198087095877671</c:v>
+                </c:pt>
+                <c:pt idx="5">
+                  <c:v>0.17203978032119782</c:v>
+                </c:pt>
+                <c:pt idx="6">
+                  <c:v>-7.2227429494055917E-2</c:v>
+                </c:pt>
+                <c:pt idx="7">
+                  <c:v>-0.143437528178192</c:v>
+                </c:pt>
+                <c:pt idx="8">
+                  <c:v>8.456020048244306E-3</c:v>
+                </c:pt>
+                <c:pt idx="9">
+                  <c:v>-0.35235328932920584</c:v>
+                </c:pt>
+                <c:pt idx="10">
+                  <c:v>8.1889053694967351E-2</c:v>
+                </c:pt>
+                <c:pt idx="11">
+                  <c:v>-2.9225236946694544E-2</c:v>
+                </c:pt>
+                <c:pt idx="12">
+                  <c:v>-0.13180430579021407</c:v>
+                </c:pt>
+                <c:pt idx="13">
+                  <c:v>-0.57861554098947998</c:v>
+                </c:pt>
+                <c:pt idx="14">
+                  <c:v>-4.2192235815299628E-2</c:v>
+                </c:pt>
+                <c:pt idx="15">
+                  <c:v>-0.11400870147080355</c:v>
+                </c:pt>
+                <c:pt idx="16">
+                  <c:v>0.36173976299704835</c:v>
+                </c:pt>
+                <c:pt idx="17">
+                  <c:v>-0.18527461263314293</c:v>
+                </c:pt>
+                <c:pt idx="18">
+                  <c:v>0.27267630472924664</c:v>
+                </c:pt>
+                <c:pt idx="19">
+                  <c:v>-0.15366407434329277</c:v>
+                </c:pt>
+                <c:pt idx="20">
+                  <c:v>0.38243616164309346</c:v>
+                </c:pt>
+                <c:pt idx="21">
+                  <c:v>0.20060822878012929</c:v>
+                </c:pt>
+                <c:pt idx="22">
+                  <c:v>-2.2331314076025843E-2</c:v>
+                </c:pt>
+                <c:pt idx="23">
+                  <c:v>-0.68141470295780093</c:v>
+                </c:pt>
+                <c:pt idx="24">
+                  <c:v>0.73647948677160979</c:v>
+                </c:pt>
+                <c:pt idx="25">
+                  <c:v>0.12339521050495272</c:v>
+                </c:pt>
+                <c:pt idx="26">
+                  <c:v>0.53602532801588543</c:v>
+                </c:pt>
+                <c:pt idx="27">
+                  <c:v>0.66958571758918106</c:v>
+                </c:pt>
+                <c:pt idx="28">
+                  <c:v>-0.30181244989872735</c:v>
+                </c:pt>
+                <c:pt idx="29">
+                  <c:v>0.17842326865551017</c:v>
+                </c:pt>
+                <c:pt idx="30">
+                  <c:v>-9.7980501504359885E-2</c:v>
+                </c:pt>
+                <c:pt idx="31">
+                  <c:v>0.36976436229551868</c:v>
+                </c:pt>
+                <c:pt idx="32">
+                  <c:v>-0.28773659423972142</c:v>
+                </c:pt>
+                <c:pt idx="33">
+                  <c:v>0.35171514565046524</c:v>
+                </c:pt>
+                <c:pt idx="34">
+                  <c:v>0.26600241700720784</c:v>
+                </c:pt>
+                <c:pt idx="35">
+                  <c:v>0.46887142741695176</c:v>
+                </c:pt>
+                <c:pt idx="36">
+                  <c:v>-0.34545795485755426</c:v>
+                </c:pt>
+                <c:pt idx="37">
+                  <c:v>0.18732973071926184</c:v>
+                </c:pt>
+                <c:pt idx="38">
+                  <c:v>-0.10718303661127826</c:v>
+                </c:pt>
+                <c:pt idx="39">
+                  <c:v>-0.58352018682867202</c:v>
+                </c:pt>
+                <c:pt idx="40">
+                  <c:v>-3.2713485806111775E-2</c:v>
+                </c:pt>
+                <c:pt idx="41">
+                  <c:v>0.44273710559664192</c:v>
+                </c:pt>
+                <c:pt idx="42">
+                  <c:v>0.11526032823285659</c:v>
+                </c:pt>
+                <c:pt idx="43">
+                  <c:v>-0.17164705516346956</c:v>
+                </c:pt>
+                <c:pt idx="44">
+                  <c:v>0.76886274290106149</c:v>
+                </c:pt>
+                <c:pt idx="45">
+                  <c:v>-0.67953997922816867</c:v>
+                </c:pt>
+                <c:pt idx="46">
+                  <c:v>0.5545099832997713</c:v>
+                </c:pt>
+                <c:pt idx="47">
+                  <c:v>0.53042048902952954</c:v>
+                </c:pt>
+                <c:pt idx="48">
+                  <c:v>-9.8343752776387072E-2</c:v>
+                </c:pt>
+                <c:pt idx="49">
+                  <c:v>-0.12737434525514335</c:v>
+                </c:pt>
+                <c:pt idx="50">
+                  <c:v>-0.58927640454731189</c:v>
+                </c:pt>
+                <c:pt idx="51">
+                  <c:v>-0.34730655546919231</c:v>
+                </c:pt>
+                <c:pt idx="52">
+                  <c:v>-0.60453595899589219</c:v>
+                </c:pt>
+                <c:pt idx="53">
+                  <c:v>-0.17702188488988069</c:v>
+                </c:pt>
+                <c:pt idx="54">
+                  <c:v>-0.16663998119214918</c:v>
+                </c:pt>
+                <c:pt idx="55">
+                  <c:v>0.14513306544112525</c:v>
+                </c:pt>
+                <c:pt idx="56">
+                  <c:v>-8.7152978164836137E-3</c:v>
+                </c:pt>
+                <c:pt idx="57">
+                  <c:v>9.4357689925521293E-2</c:v>
+                </c:pt>
+                <c:pt idx="58">
+                  <c:v>0.27283282765427541</c:v>
+                </c:pt>
+                <c:pt idx="59">
+                  <c:v>-0.28604952291250318</c:v>
+                </c:pt>
+                <c:pt idx="60">
+                  <c:v>-0.40783810073229176</c:v>
+                </c:pt>
+                <c:pt idx="61">
+                  <c:v>0.13844627510844965</c:v>
+                </c:pt>
+                <c:pt idx="62">
+                  <c:v>-0.36859288258787215</c:v>
+                </c:pt>
+                <c:pt idx="63">
+                  <c:v>-0.27032008215287262</c:v>
+                </c:pt>
+                <c:pt idx="64">
+                  <c:v>-0.37239453177392279</c:v>
+                </c:pt>
+                <c:pt idx="65">
+                  <c:v>-9.2772336529813315E-2</c:v>
+                </c:pt>
+                <c:pt idx="66">
+                  <c:v>0.45134505732822949</c:v>
+                </c:pt>
+                <c:pt idx="67">
+                  <c:v>-0.15443817476154398</c:v>
+                </c:pt>
+                <c:pt idx="68">
+                  <c:v>-0.24332495327375803</c:v>
+                </c:pt>
+                <c:pt idx="69">
+                  <c:v>0.31764723067875311</c:v>
+                </c:pt>
+                <c:pt idx="70">
+                  <c:v>0.5573229687798037</c:v>
+                </c:pt>
+                <c:pt idx="71">
+                  <c:v>0.20946846438207112</c:v>
+                </c:pt>
+                <c:pt idx="72">
+                  <c:v>0.27163099740271823</c:v>
+                </c:pt>
+                <c:pt idx="73">
+                  <c:v>-0.77229790957721067</c:v>
+                </c:pt>
+                <c:pt idx="74">
+                  <c:v>0.84242437924977343</c:v>
+                </c:pt>
+                <c:pt idx="75">
+                  <c:v>0.86296714619354631</c:v>
+                </c:pt>
+                <c:pt idx="76">
+                  <c:v>6.7162485183983933E-2</c:v>
+                </c:pt>
+                <c:pt idx="77">
+                  <c:v>-0.13416971713316939</c:v>
+                </c:pt>
+                <c:pt idx="78">
+                  <c:v>-5.1588678956327794E-2</c:v>
+                </c:pt>
+                <c:pt idx="79">
+                  <c:v>3.3290280155807817E-2</c:v>
+                </c:pt>
+                <c:pt idx="80">
+                  <c:v>0.62311506810699224</c:v>
+                </c:pt>
+                <c:pt idx="81">
+                  <c:v>0.27144069048915798</c:v>
+                </c:pt>
+                <c:pt idx="82">
+                  <c:v>-0.29100188349742573</c:v>
+                </c:pt>
+                <c:pt idx="83">
+                  <c:v>4.1157333905492033E-2</c:v>
+                </c:pt>
+                <c:pt idx="84">
+                  <c:v>5.4611547756455603E-2</c:v>
+                </c:pt>
+                <c:pt idx="85">
+                  <c:v>-0.44992268069882568</c:v>
+                </c:pt>
+                <c:pt idx="86">
+                  <c:v>-0.65822238021863777</c:v>
+                </c:pt>
+                <c:pt idx="87">
+                  <c:v>0.30175043568160254</c:v>
+                </c:pt>
+                <c:pt idx="88">
+                  <c:v>8.2638679032126516E-3</c:v>
+                </c:pt>
+                <c:pt idx="89">
+                  <c:v>0.16583958013623568</c:v>
+                </c:pt>
+                <c:pt idx="90">
+                  <c:v>-0.10347283285607345</c:v>
+                </c:pt>
+                <c:pt idx="91">
+                  <c:v>-8.1856674282649422E-2</c:v>
+                </c:pt>
+                <c:pt idx="92">
+                  <c:v>0.2990677377715506</c:v>
+                </c:pt>
+                <c:pt idx="93">
+                  <c:v>-0.43398061842079982</c:v>
+                </c:pt>
+                <c:pt idx="94">
+                  <c:v>0.2504171393823561</c:v>
+                </c:pt>
+                <c:pt idx="95">
+                  <c:v>-0.13741374730603295</c:v>
+                </c:pt>
+                <c:pt idx="96">
+                  <c:v>-0.61771382058482582</c:v>
+                </c:pt>
+                <c:pt idx="97">
+                  <c:v>-9.9087379151387878E-2</c:v>
+                </c:pt>
+                <c:pt idx="98">
+                  <c:v>-0.42282555110932851</c:v>
+                </c:pt>
+                <c:pt idx="99">
+                  <c:v>-0.70125365747555679</c:v>
+                </c:pt>
+              </c:numCache>
+            </c:numRef>
+          </c:yVal>
+          <c:smooth val="0"/>
+          <c:extLst>
+            <c:ext xmlns:c16="http://schemas.microsoft.com/office/drawing/2014/chart" uri="{C3380CC4-5D6E-409C-BE32-E72D297353CC}">
+              <c16:uniqueId val="{00000004-40CE-4D48-90B0-9C4F6EB66D2E}"/>
+            </c:ext>
+          </c:extLst>
+        </c:ser>
+        <c:dLbls>
+          <c:showLegendKey val="0"/>
+          <c:showVal val="0"/>
+          <c:showCatName val="0"/>
+          <c:showSerName val="0"/>
+          <c:showPercent val="0"/>
+          <c:showBubbleSize val="0"/>
+        </c:dLbls>
+        <c:axId val="517302008"/>
+        <c:axId val="517302664"/>
+      </c:scatterChart>
+      <c:valAx>
+        <c:axId val="517302008"/>
+        <c:scaling>
+          <c:orientation val="minMax"/>
+          <c:max val="1"/>
+        </c:scaling>
+        <c:delete val="1"/>
+        <c:axPos val="b"/>
+        <c:numFmt formatCode="General" sourceLinked="1"/>
+        <c:majorTickMark val="out"/>
+        <c:minorTickMark val="none"/>
+        <c:tickLblPos val="nextTo"/>
+        <c:crossAx val="517302664"/>
+        <c:crosses val="autoZero"/>
+        <c:crossBetween val="midCat"/>
+      </c:valAx>
+      <c:valAx>
+        <c:axId val="517302664"/>
+        <c:scaling>
+          <c:orientation val="minMax"/>
+        </c:scaling>
+        <c:delete val="1"/>
+        <c:axPos val="l"/>
+        <c:numFmt formatCode="General" sourceLinked="1"/>
+        <c:majorTickMark val="none"/>
+        <c:minorTickMark val="none"/>
+        <c:tickLblPos val="nextTo"/>
+        <c:crossAx val="517302008"/>
+        <c:crosses val="autoZero"/>
+        <c:crossBetween val="midCat"/>
+      </c:valAx>
+      <c:spPr>
+        <a:noFill/>
+        <a:ln>
+          <a:noFill/>
+        </a:ln>
+        <a:effectLst/>
+      </c:spPr>
+    </c:plotArea>
+    <c:plotVisOnly val="1"/>
+    <c:dispBlanksAs val="gap"/>
+    <c:showDLblsOverMax val="0"/>
+  </c:chart>
+  <c:spPr>
+    <a:noFill/>
+    <a:ln>
+      <a:noFill/>
+    </a:ln>
+    <a:effectLst/>
+  </c:spPr>
+  <c:txPr>
+    <a:bodyPr/>
+    <a:lstStyle/>
+    <a:p>
+      <a:pPr>
+        <a:defRPr/>
+      </a:pPr>
+      <a:endParaRPr lang="ja-JP"/>
+    </a:p>
+  </c:txPr>
+  <c:externalData r:id="rId3">
+    <c:autoUpdate val="0"/>
+  </c:externalData>
+</c:chartSpace>
+</file>
+
+<file path=ppt/charts/colors1.xml><?xml version="1.0" encoding="utf-8"?>
+<cs:colorStyle xmlns:cs="http://schemas.microsoft.com/office/drawing/2012/chartStyle" xmlns:a="http://schemas.openxmlformats.org/drawingml/2006/main" meth="cycle" id="10">
+  <a:schemeClr val="accent1"/>
+  <a:schemeClr val="accent2"/>
+  <a:schemeClr val="accent3"/>
+  <a:schemeClr val="accent4"/>
+  <a:schemeClr val="accent5"/>
+  <a:schemeClr val="accent6"/>
+  <cs:variation/>
+  <cs:variation>
+    <a:lumMod val="60000"/>
+  </cs:variation>
+  <cs:variation>
+    <a:lumMod val="80000"/>
+    <a:lumOff val="20000"/>
+  </cs:variation>
+  <cs:variation>
+    <a:lumMod val="80000"/>
+  </cs:variation>
+  <cs:variation>
+    <a:lumMod val="60000"/>
+    <a:lumOff val="40000"/>
+  </cs:variation>
+  <cs:variation>
+    <a:lumMod val="50000"/>
+  </cs:variation>
+  <cs:variation>
+    <a:lumMod val="70000"/>
+    <a:lumOff val="30000"/>
+  </cs:variation>
+  <cs:variation>
+    <a:lumMod val="70000"/>
+  </cs:variation>
+  <cs:variation>
+    <a:lumMod val="50000"/>
+    <a:lumOff val="50000"/>
+  </cs:variation>
+</cs:colorStyle>
+</file>
+
+<file path=ppt/charts/colors2.xml><?xml version="1.0" encoding="utf-8"?>
+<cs:colorStyle xmlns:cs="http://schemas.microsoft.com/office/drawing/2012/chartStyle" xmlns:a="http://schemas.openxmlformats.org/drawingml/2006/main" meth="cycle" id="10">
+  <a:schemeClr val="accent1"/>
+  <a:schemeClr val="accent2"/>
+  <a:schemeClr val="accent3"/>
+  <a:schemeClr val="accent4"/>
+  <a:schemeClr val="accent5"/>
+  <a:schemeClr val="accent6"/>
+  <cs:variation/>
+  <cs:variation>
+    <a:lumMod val="60000"/>
+  </cs:variation>
+  <cs:variation>
+    <a:lumMod val="80000"/>
+    <a:lumOff val="20000"/>
+  </cs:variation>
+  <cs:variation>
+    <a:lumMod val="80000"/>
+  </cs:variation>
+  <cs:variation>
+    <a:lumMod val="60000"/>
+    <a:lumOff val="40000"/>
+  </cs:variation>
+  <cs:variation>
+    <a:lumMod val="50000"/>
+  </cs:variation>
+  <cs:variation>
+    <a:lumMod val="70000"/>
+    <a:lumOff val="30000"/>
+  </cs:variation>
+  <cs:variation>
+    <a:lumMod val="70000"/>
+  </cs:variation>
+  <cs:variation>
+    <a:lumMod val="50000"/>
+    <a:lumOff val="50000"/>
+  </cs:variation>
+</cs:colorStyle>
+</file>
+
+<file path=ppt/charts/style1.xml><?xml version="1.0" encoding="utf-8"?>
+<cs:chartStyle xmlns:cs="http://schemas.microsoft.com/office/drawing/2012/chartStyle" xmlns:a="http://schemas.openxmlformats.org/drawingml/2006/main" id="240">
+  <cs:axisTitle>
+    <cs:lnRef idx="0"/>
+    <cs:fillRef idx="0"/>
+    <cs:effectRef idx="0"/>
+    <cs:fontRef idx="minor">
+      <a:schemeClr val="tx1">
+        <a:lumMod val="65000"/>
+        <a:lumOff val="35000"/>
+      </a:schemeClr>
+    </cs:fontRef>
+    <cs:defRPr sz="1330" kern="1200"/>
+  </cs:axisTitle>
+  <cs:categoryAxis>
+    <cs:lnRef idx="0"/>
+    <cs:fillRef idx="0"/>
+    <cs:effectRef idx="0"/>
+    <cs:fontRef idx="minor">
+      <a:schemeClr val="tx1">
+        <a:lumMod val="65000"/>
+        <a:lumOff val="35000"/>
+      </a:schemeClr>
+    </cs:fontRef>
+    <cs:spPr>
+      <a:ln w="9525" cap="flat" cmpd="sng" algn="ctr">
+        <a:solidFill>
+          <a:schemeClr val="tx1">
+            <a:lumMod val="25000"/>
+            <a:lumOff val="75000"/>
+          </a:schemeClr>
+        </a:solidFill>
+        <a:round/>
+      </a:ln>
+    </cs:spPr>
+    <cs:defRPr sz="1197" kern="1200"/>
+  </cs:categoryAxis>
+  <cs:chartArea mods="allowNoFillOverride allowNoLineOverride">
+    <cs:lnRef idx="0"/>
+    <cs:fillRef idx="0"/>
+    <cs:effectRef idx="0"/>
+    <cs:fontRef idx="minor">
+      <a:schemeClr val="tx1"/>
+    </cs:fontRef>
+    <cs:spPr>
+      <a:solidFill>
+        <a:schemeClr val="bg1"/>
+      </a:solidFill>
+      <a:ln w="9525" cap="flat" cmpd="sng" algn="ctr">
+        <a:solidFill>
+          <a:schemeClr val="tx1">
+            <a:lumMod val="15000"/>
+            <a:lumOff val="85000"/>
+          </a:schemeClr>
+        </a:solidFill>
+        <a:round/>
+      </a:ln>
+    </cs:spPr>
+    <cs:defRPr sz="1330" kern="1200"/>
+  </cs:chartArea>
+  <cs:dataLabel>
+    <cs:lnRef idx="0"/>
+    <cs:fillRef idx="0"/>
+    <cs:effectRef idx="0"/>
+    <cs:fontRef idx="minor">
+      <a:schemeClr val="tx1">
+        <a:lumMod val="75000"/>
+        <a:lumOff val="25000"/>
+      </a:schemeClr>
+    </cs:fontRef>
+    <cs:defRPr sz="1197" kern="1200"/>
+  </cs:dataLabel>
+  <cs:dataLabelCallout>
+    <cs:lnRef idx="0"/>
+    <cs:fillRef idx="0"/>
+    <cs:effectRef idx="0"/>
+    <cs:fontRef idx="minor">
+      <a:schemeClr val="dk1">
+        <a:lumMod val="65000"/>
+        <a:lumOff val="35000"/>
+      </a:schemeClr>
+    </cs:fontRef>
+    <cs:spPr>
+      <a:solidFill>
+        <a:schemeClr val="lt1"/>
+      </a:solidFill>
+      <a:ln>
+        <a:solidFill>
+          <a:schemeClr val="dk1">
+            <a:lumMod val="25000"/>
+            <a:lumOff val="75000"/>
+          </a:schemeClr>
+        </a:solidFill>
+      </a:ln>
+    </cs:spPr>
+    <cs:defRPr sz="1197" kern="1200"/>
+    <cs:bodyPr rot="0" spcFirstLastPara="1" vertOverflow="clip" horzOverflow="clip" vert="horz" wrap="square" lIns="36576" tIns="18288" rIns="36576" bIns="18288" anchor="ctr" anchorCtr="1">
+      <a:spAutoFit/>
+    </cs:bodyPr>
+  </cs:dataLabelCallout>
+  <cs:dataPoint>
+    <cs:lnRef idx="0"/>
+    <cs:fillRef idx="1">
+      <cs:styleClr val="auto"/>
+    </cs:fillRef>
+    <cs:effectRef idx="0"/>
+    <cs:fontRef idx="minor">
+      <a:schemeClr val="tx1"/>
+    </cs:fontRef>
+  </cs:dataPoint>
+  <cs:dataPoint3D>
+    <cs:lnRef idx="0"/>
+    <cs:fillRef idx="1">
+      <cs:styleClr val="auto"/>
+    </cs:fillRef>
+    <cs:effectRef idx="0"/>
+    <cs:fontRef idx="minor">
+      <a:schemeClr val="tx1"/>
+    </cs:fontRef>
+  </cs:dataPoint3D>
+  <cs:dataPointLine>
+    <cs:lnRef idx="0">
+      <cs:styleClr val="auto"/>
+    </cs:lnRef>
+    <cs:fillRef idx="1"/>
+    <cs:effectRef idx="0"/>
+    <cs:fontRef idx="minor">
+      <a:schemeClr val="tx1"/>
+    </cs:fontRef>
+    <cs:spPr>
+      <a:ln w="19050" cap="rnd">
+        <a:solidFill>
+          <a:schemeClr val="phClr"/>
+        </a:solidFill>
+        <a:round/>
+      </a:ln>
+    </cs:spPr>
+  </cs:dataPointLine>
+  <cs:dataPointMarker>
+    <cs:lnRef idx="0">
+      <cs:styleClr val="auto"/>
+    </cs:lnRef>
+    <cs:fillRef idx="1">
+      <cs:styleClr val="auto"/>
+    </cs:fillRef>
+    <cs:effectRef idx="0"/>
+    <cs:fontRef idx="minor">
+      <a:schemeClr val="tx1"/>
+    </cs:fontRef>
+    <cs:spPr>
+      <a:ln w="9525">
+        <a:solidFill>
+          <a:schemeClr val="phClr"/>
+        </a:solidFill>
+      </a:ln>
+    </cs:spPr>
+  </cs:dataPointMarker>
+  <cs:dataPointMarkerLayout symbol="circle" size="5"/>
+  <cs:dataPointWireframe>
+    <cs:lnRef idx="0">
+      <cs:styleClr val="auto"/>
+    </cs:lnRef>
+    <cs:fillRef idx="0"/>
+    <cs:effectRef idx="0"/>
+    <cs:fontRef idx="minor">
+      <a:schemeClr val="dk1"/>
+    </cs:fontRef>
+    <cs:spPr>
+      <a:ln w="9525" cap="rnd">
+        <a:solidFill>
+          <a:schemeClr val="phClr"/>
+        </a:solidFill>
+        <a:round/>
+      </a:ln>
+    </cs:spPr>
+  </cs:dataPointWireframe>
+  <cs:dataTable>
+    <cs:lnRef idx="0"/>
+    <cs:fillRef idx="0"/>
+    <cs:effectRef idx="0"/>
+    <cs:fontRef idx="minor">
+      <a:schemeClr val="tx1">
+        <a:lumMod val="65000"/>
+        <a:lumOff val="35000"/>
+      </a:schemeClr>
+    </cs:fontRef>
+    <cs:spPr>
+      <a:noFill/>
+      <a:ln w="9525" cap="flat" cmpd="sng" algn="ctr">
+        <a:solidFill>
+          <a:schemeClr val="tx1">
+            <a:lumMod val="15000"/>
+            <a:lumOff val="85000"/>
+          </a:schemeClr>
+        </a:solidFill>
+        <a:round/>
+      </a:ln>
+    </cs:spPr>
+    <cs:defRPr sz="1197" kern="1200"/>
+  </cs:dataTable>
+  <cs:downBar>
+    <cs:lnRef idx="0"/>
+    <cs:fillRef idx="0"/>
+    <cs:effectRef idx="0"/>
+    <cs:fontRef idx="minor">
+      <a:schemeClr val="tx1"/>
+    </cs:fontRef>
+    <cs:spPr>
+      <a:solidFill>
+        <a:schemeClr val="dk1">
+          <a:lumMod val="75000"/>
+          <a:lumOff val="25000"/>
+        </a:schemeClr>
+      </a:solidFill>
+      <a:ln w="9525" cap="flat" cmpd="sng" algn="ctr">
+        <a:solidFill>
+          <a:schemeClr val="tx1">
+            <a:lumMod val="65000"/>
+            <a:lumOff val="35000"/>
+          </a:schemeClr>
+        </a:solidFill>
+        <a:round/>
+      </a:ln>
+    </cs:spPr>
+  </cs:downBar>
+  <cs:dropLine>
+    <cs:lnRef idx="0"/>
+    <cs:fillRef idx="0"/>
+    <cs:effectRef idx="0"/>
+    <cs:fontRef idx="minor">
+      <a:schemeClr val="tx1"/>
+    </cs:fontRef>
+    <cs:spPr>
+      <a:ln w="9525" cap="flat" cmpd="sng" algn="ctr">
+        <a:solidFill>
+          <a:schemeClr val="tx1">
+            <a:lumMod val="35000"/>
+            <a:lumOff val="65000"/>
+          </a:schemeClr>
+        </a:solidFill>
+        <a:round/>
+      </a:ln>
+    </cs:spPr>
+  </cs:dropLine>
+  <cs:errorBar>
+    <cs:lnRef idx="0"/>
+    <cs:fillRef idx="0"/>
+    <cs:effectRef idx="0"/>
+    <cs:fontRef idx="minor">
+      <a:schemeClr val="tx1"/>
+    </cs:fontRef>
+    <cs:spPr>
+      <a:ln w="9525" cap="flat" cmpd="sng" algn="ctr">
+        <a:solidFill>
+          <a:schemeClr val="tx1">
+            <a:lumMod val="65000"/>
+            <a:lumOff val="35000"/>
+          </a:schemeClr>
+        </a:solidFill>
+        <a:round/>
+      </a:ln>
+    </cs:spPr>
+  </cs:errorBar>
+  <cs:floor>
+    <cs:lnRef idx="0"/>
+    <cs:fillRef idx="0"/>
+    <cs:effectRef idx="0"/>
+    <cs:fontRef idx="minor">
+      <a:schemeClr val="tx1"/>
+    </cs:fontRef>
+    <cs:spPr>
+      <a:noFill/>
+      <a:ln>
+        <a:noFill/>
+      </a:ln>
+    </cs:spPr>
+  </cs:floor>
+  <cs:gridlineMajor>
+    <cs:lnRef idx="0"/>
+    <cs:fillRef idx="0"/>
+    <cs:effectRef idx="0"/>
+    <cs:fontRef idx="minor">
+      <a:schemeClr val="tx1"/>
+    </cs:fontRef>
+    <cs:spPr>
+      <a:ln w="9525" cap="flat" cmpd="sng" algn="ctr">
+        <a:solidFill>
+          <a:schemeClr val="tx1">
+            <a:lumMod val="15000"/>
+            <a:lumOff val="85000"/>
+          </a:schemeClr>
+        </a:solidFill>
+        <a:round/>
+      </a:ln>
+    </cs:spPr>
+  </cs:gridlineMajor>
+  <cs:gridlineMinor>
+    <cs:lnRef idx="0"/>
+    <cs:fillRef idx="0"/>
+    <cs:effectRef idx="0"/>
+    <cs:fontRef idx="minor">
+      <a:schemeClr val="tx1"/>
+    </cs:fontRef>
+    <cs:spPr>
+      <a:ln w="9525" cap="flat" cmpd="sng" algn="ctr">
+        <a:solidFill>
+          <a:schemeClr val="tx1">
+            <a:lumMod val="5000"/>
+            <a:lumOff val="95000"/>
+          </a:schemeClr>
+        </a:solidFill>
+        <a:round/>
+      </a:ln>
+    </cs:spPr>
+  </cs:gridlineMinor>
+  <cs:hiLoLine>
+    <cs:lnRef idx="0"/>
+    <cs:fillRef idx="0"/>
+    <cs:effectRef idx="0"/>
+    <cs:fontRef idx="minor">
+      <a:schemeClr val="tx1"/>
+    </cs:fontRef>
+    <cs:spPr>
+      <a:ln w="9525" cap="flat" cmpd="sng" algn="ctr">
+        <a:solidFill>
+          <a:schemeClr val="tx1">
+            <a:lumMod val="50000"/>
+            <a:lumOff val="50000"/>
+          </a:schemeClr>
+        </a:solidFill>
+        <a:round/>
+      </a:ln>
+    </cs:spPr>
+  </cs:hiLoLine>
+  <cs:leaderLine>
+    <cs:lnRef idx="0"/>
+    <cs:fillRef idx="0"/>
+    <cs:effectRef idx="0"/>
+    <cs:fontRef idx="minor">
+      <a:schemeClr val="tx1"/>
+    </cs:fontRef>
+    <cs:spPr>
+      <a:ln w="9525" cap="flat" cmpd="sng" algn="ctr">
+        <a:solidFill>
+          <a:schemeClr val="tx1">
+            <a:lumMod val="35000"/>
+            <a:lumOff val="65000"/>
+          </a:schemeClr>
+        </a:solidFill>
+        <a:round/>
+      </a:ln>
+    </cs:spPr>
+  </cs:leaderLine>
+  <cs:legend>
+    <cs:lnRef idx="0"/>
+    <cs:fillRef idx="0"/>
+    <cs:effectRef idx="0"/>
+    <cs:fontRef idx="minor">
+      <a:schemeClr val="tx1">
+        <a:lumMod val="65000"/>
+        <a:lumOff val="35000"/>
+      </a:schemeClr>
+    </cs:fontRef>
+    <cs:defRPr sz="1197" kern="1200"/>
+  </cs:legend>
+  <cs:plotArea mods="allowNoFillOverride allowNoLineOverride">
+    <cs:lnRef idx="0"/>
+    <cs:fillRef idx="0"/>
+    <cs:effectRef idx="0"/>
+    <cs:fontRef idx="minor">
+      <a:schemeClr val="tx1"/>
+    </cs:fontRef>
+  </cs:plotArea>
+  <cs:plotArea3D mods="allowNoFillOverride allowNoLineOverride">
+    <cs:lnRef idx="0"/>
+    <cs:fillRef idx="0"/>
+    <cs:effectRef idx="0"/>
+    <cs:fontRef idx="minor">
+      <a:schemeClr val="tx1"/>
+    </cs:fontRef>
+  </cs:plotArea3D>
+  <cs:seriesAxis>
+    <cs:lnRef idx="0"/>
+    <cs:fillRef idx="0"/>
+    <cs:effectRef idx="0"/>
+    <cs:fontRef idx="minor">
+      <a:schemeClr val="tx1">
+        <a:lumMod val="65000"/>
+        <a:lumOff val="35000"/>
+      </a:schemeClr>
+    </cs:fontRef>
+    <cs:defRPr sz="1197" kern="1200"/>
+  </cs:seriesAxis>
+  <cs:seriesLine>
+    <cs:lnRef idx="0"/>
+    <cs:fillRef idx="0"/>
+    <cs:effectRef idx="0"/>
+    <cs:fontRef idx="minor">
+      <a:schemeClr val="tx1"/>
+    </cs:fontRef>
+    <cs:spPr>
+      <a:ln w="9525" cap="flat" cmpd="sng" algn="ctr">
+        <a:solidFill>
+          <a:schemeClr val="tx1">
+            <a:lumMod val="35000"/>
+            <a:lumOff val="65000"/>
+          </a:schemeClr>
+        </a:solidFill>
+        <a:round/>
+      </a:ln>
+    </cs:spPr>
+  </cs:seriesLine>
+  <cs:title>
+    <cs:lnRef idx="0"/>
+    <cs:fillRef idx="0"/>
+    <cs:effectRef idx="0"/>
+    <cs:fontRef idx="minor">
+      <a:schemeClr val="tx1">
+        <a:lumMod val="65000"/>
+        <a:lumOff val="35000"/>
+      </a:schemeClr>
+    </cs:fontRef>
+    <cs:defRPr sz="1862" b="0" kern="1200" spc="0" baseline="0"/>
+  </cs:title>
+  <cs:trendline>
+    <cs:lnRef idx="0">
+      <cs:styleClr val="auto"/>
+    </cs:lnRef>
+    <cs:fillRef idx="0"/>
+    <cs:effectRef idx="0"/>
+    <cs:fontRef idx="minor">
+      <a:schemeClr val="tx1"/>
+    </cs:fontRef>
+    <cs:spPr>
+      <a:ln w="19050" cap="rnd">
+        <a:solidFill>
+          <a:schemeClr val="phClr"/>
+        </a:solidFill>
+        <a:prstDash val="sysDot"/>
+      </a:ln>
+    </cs:spPr>
+  </cs:trendline>
+  <cs:trendlineLabel>
+    <cs:lnRef idx="0"/>
+    <cs:fillRef idx="0"/>
+    <cs:effectRef idx="0"/>
+    <cs:fontRef idx="minor">
+      <a:schemeClr val="tx1">
+        <a:lumMod val="65000"/>
+        <a:lumOff val="35000"/>
+      </a:schemeClr>
+    </cs:fontRef>
+    <cs:defRPr sz="1197" kern="1200"/>
+  </cs:trendlineLabel>
+  <cs:upBar>
+    <cs:lnRef idx="0"/>
+    <cs:fillRef idx="0"/>
+    <cs:effectRef idx="0"/>
+    <cs:fontRef idx="minor">
+      <a:schemeClr val="tx1"/>
+    </cs:fontRef>
+    <cs:spPr>
+      <a:solidFill>
+        <a:schemeClr val="lt1"/>
+      </a:solidFill>
+      <a:ln w="9525" cap="flat" cmpd="sng" algn="ctr">
+        <a:solidFill>
+          <a:schemeClr val="tx1">
+            <a:lumMod val="65000"/>
+            <a:lumOff val="35000"/>
+          </a:schemeClr>
+        </a:solidFill>
+        <a:round/>
+      </a:ln>
+    </cs:spPr>
+  </cs:upBar>
+  <cs:valueAxis>
+    <cs:lnRef idx="0"/>
+    <cs:fillRef idx="0"/>
+    <cs:effectRef idx="0"/>
+    <cs:fontRef idx="minor">
+      <a:schemeClr val="tx1">
+        <a:lumMod val="65000"/>
+        <a:lumOff val="35000"/>
+      </a:schemeClr>
+    </cs:fontRef>
+    <cs:spPr>
+      <a:ln w="9525" cap="flat" cmpd="sng" algn="ctr">
+        <a:solidFill>
+          <a:schemeClr val="tx1">
+            <a:lumMod val="25000"/>
+            <a:lumOff val="75000"/>
+          </a:schemeClr>
+        </a:solidFill>
+        <a:round/>
+      </a:ln>
+    </cs:spPr>
+    <cs:defRPr sz="1197" kern="1200"/>
+  </cs:valueAxis>
+  <cs:wall>
+    <cs:lnRef idx="0"/>
+    <cs:fillRef idx="0"/>
+    <cs:effectRef idx="0"/>
+    <cs:fontRef idx="minor">
+      <a:schemeClr val="tx1"/>
+    </cs:fontRef>
+    <cs:spPr>
+      <a:noFill/>
+      <a:ln>
+        <a:noFill/>
+      </a:ln>
+    </cs:spPr>
+  </cs:wall>
+</cs:chartStyle>
+</file>
+
+<file path=ppt/charts/style2.xml><?xml version="1.0" encoding="utf-8"?>
+<cs:chartStyle xmlns:cs="http://schemas.microsoft.com/office/drawing/2012/chartStyle" xmlns:a="http://schemas.openxmlformats.org/drawingml/2006/main" id="240">
+  <cs:axisTitle>
+    <cs:lnRef idx="0"/>
+    <cs:fillRef idx="0"/>
+    <cs:effectRef idx="0"/>
+    <cs:fontRef idx="minor">
+      <a:schemeClr val="tx1">
+        <a:lumMod val="65000"/>
+        <a:lumOff val="35000"/>
+      </a:schemeClr>
+    </cs:fontRef>
+    <cs:defRPr sz="1330" kern="1200"/>
+  </cs:axisTitle>
+  <cs:categoryAxis>
+    <cs:lnRef idx="0"/>
+    <cs:fillRef idx="0"/>
+    <cs:effectRef idx="0"/>
+    <cs:fontRef idx="minor">
+      <a:schemeClr val="tx1">
+        <a:lumMod val="65000"/>
+        <a:lumOff val="35000"/>
+      </a:schemeClr>
+    </cs:fontRef>
+    <cs:spPr>
+      <a:ln w="9525" cap="flat" cmpd="sng" algn="ctr">
+        <a:solidFill>
+          <a:schemeClr val="tx1">
+            <a:lumMod val="25000"/>
+            <a:lumOff val="75000"/>
+          </a:schemeClr>
+        </a:solidFill>
+        <a:round/>
+      </a:ln>
+    </cs:spPr>
+    <cs:defRPr sz="1197" kern="1200"/>
+  </cs:categoryAxis>
+  <cs:chartArea mods="allowNoFillOverride allowNoLineOverride">
+    <cs:lnRef idx="0"/>
+    <cs:fillRef idx="0"/>
+    <cs:effectRef idx="0"/>
+    <cs:fontRef idx="minor">
+      <a:schemeClr val="tx1"/>
+    </cs:fontRef>
+    <cs:spPr>
+      <a:solidFill>
+        <a:schemeClr val="bg1"/>
+      </a:solidFill>
+      <a:ln w="9525" cap="flat" cmpd="sng" algn="ctr">
+        <a:solidFill>
+          <a:schemeClr val="tx1">
+            <a:lumMod val="15000"/>
+            <a:lumOff val="85000"/>
+          </a:schemeClr>
+        </a:solidFill>
+        <a:round/>
+      </a:ln>
+    </cs:spPr>
+    <cs:defRPr sz="1330" kern="1200"/>
+  </cs:chartArea>
+  <cs:dataLabel>
+    <cs:lnRef idx="0"/>
+    <cs:fillRef idx="0"/>
+    <cs:effectRef idx="0"/>
+    <cs:fontRef idx="minor">
+      <a:schemeClr val="tx1">
+        <a:lumMod val="75000"/>
+        <a:lumOff val="25000"/>
+      </a:schemeClr>
+    </cs:fontRef>
+    <cs:defRPr sz="1197" kern="1200"/>
+  </cs:dataLabel>
+  <cs:dataLabelCallout>
+    <cs:lnRef idx="0"/>
+    <cs:fillRef idx="0"/>
+    <cs:effectRef idx="0"/>
+    <cs:fontRef idx="minor">
+      <a:schemeClr val="dk1">
+        <a:lumMod val="65000"/>
+        <a:lumOff val="35000"/>
+      </a:schemeClr>
+    </cs:fontRef>
+    <cs:spPr>
+      <a:solidFill>
+        <a:schemeClr val="lt1"/>
+      </a:solidFill>
+      <a:ln>
+        <a:solidFill>
+          <a:schemeClr val="dk1">
+            <a:lumMod val="25000"/>
+            <a:lumOff val="75000"/>
+          </a:schemeClr>
+        </a:solidFill>
+      </a:ln>
+    </cs:spPr>
+    <cs:defRPr sz="1197" kern="1200"/>
+    <cs:bodyPr rot="0" spcFirstLastPara="1" vertOverflow="clip" horzOverflow="clip" vert="horz" wrap="square" lIns="36576" tIns="18288" rIns="36576" bIns="18288" anchor="ctr" anchorCtr="1">
+      <a:spAutoFit/>
+    </cs:bodyPr>
+  </cs:dataLabelCallout>
+  <cs:dataPoint>
+    <cs:lnRef idx="0"/>
+    <cs:fillRef idx="1">
+      <cs:styleClr val="auto"/>
+    </cs:fillRef>
+    <cs:effectRef idx="0"/>
+    <cs:fontRef idx="minor">
+      <a:schemeClr val="tx1"/>
+    </cs:fontRef>
+  </cs:dataPoint>
+  <cs:dataPoint3D>
+    <cs:lnRef idx="0"/>
+    <cs:fillRef idx="1">
+      <cs:styleClr val="auto"/>
+    </cs:fillRef>
+    <cs:effectRef idx="0"/>
+    <cs:fontRef idx="minor">
+      <a:schemeClr val="tx1"/>
+    </cs:fontRef>
+  </cs:dataPoint3D>
+  <cs:dataPointLine>
+    <cs:lnRef idx="0">
+      <cs:styleClr val="auto"/>
+    </cs:lnRef>
+    <cs:fillRef idx="1"/>
+    <cs:effectRef idx="0"/>
+    <cs:fontRef idx="minor">
+      <a:schemeClr val="tx1"/>
+    </cs:fontRef>
+    <cs:spPr>
+      <a:ln w="19050" cap="rnd">
+        <a:solidFill>
+          <a:schemeClr val="phClr"/>
+        </a:solidFill>
+        <a:round/>
+      </a:ln>
+    </cs:spPr>
+  </cs:dataPointLine>
+  <cs:dataPointMarker>
+    <cs:lnRef idx="0">
+      <cs:styleClr val="auto"/>
+    </cs:lnRef>
+    <cs:fillRef idx="1">
+      <cs:styleClr val="auto"/>
+    </cs:fillRef>
+    <cs:effectRef idx="0"/>
+    <cs:fontRef idx="minor">
+      <a:schemeClr val="tx1"/>
+    </cs:fontRef>
+    <cs:spPr>
+      <a:ln w="9525">
+        <a:solidFill>
+          <a:schemeClr val="phClr"/>
+        </a:solidFill>
+      </a:ln>
+    </cs:spPr>
+  </cs:dataPointMarker>
+  <cs:dataPointMarkerLayout symbol="circle" size="5"/>
+  <cs:dataPointWireframe>
+    <cs:lnRef idx="0">
+      <cs:styleClr val="auto"/>
+    </cs:lnRef>
+    <cs:fillRef idx="0"/>
+    <cs:effectRef idx="0"/>
+    <cs:fontRef idx="minor">
+      <a:schemeClr val="dk1"/>
+    </cs:fontRef>
+    <cs:spPr>
+      <a:ln w="9525" cap="rnd">
+        <a:solidFill>
+          <a:schemeClr val="phClr"/>
+        </a:solidFill>
+        <a:round/>
+      </a:ln>
+    </cs:spPr>
+  </cs:dataPointWireframe>
+  <cs:dataTable>
+    <cs:lnRef idx="0"/>
+    <cs:fillRef idx="0"/>
+    <cs:effectRef idx="0"/>
+    <cs:fontRef idx="minor">
+      <a:schemeClr val="tx1">
+        <a:lumMod val="65000"/>
+        <a:lumOff val="35000"/>
+      </a:schemeClr>
+    </cs:fontRef>
+    <cs:spPr>
+      <a:noFill/>
+      <a:ln w="9525" cap="flat" cmpd="sng" algn="ctr">
+        <a:solidFill>
+          <a:schemeClr val="tx1">
+            <a:lumMod val="15000"/>
+            <a:lumOff val="85000"/>
+          </a:schemeClr>
+        </a:solidFill>
+        <a:round/>
+      </a:ln>
+    </cs:spPr>
+    <cs:defRPr sz="1197" kern="1200"/>
+  </cs:dataTable>
+  <cs:downBar>
+    <cs:lnRef idx="0"/>
+    <cs:fillRef idx="0"/>
+    <cs:effectRef idx="0"/>
+    <cs:fontRef idx="minor">
+      <a:schemeClr val="tx1"/>
+    </cs:fontRef>
+    <cs:spPr>
+      <a:solidFill>
+        <a:schemeClr val="dk1">
+          <a:lumMod val="75000"/>
+          <a:lumOff val="25000"/>
+        </a:schemeClr>
+      </a:solidFill>
+      <a:ln w="9525" cap="flat" cmpd="sng" algn="ctr">
+        <a:solidFill>
+          <a:schemeClr val="tx1">
+            <a:lumMod val="65000"/>
+            <a:lumOff val="35000"/>
+          </a:schemeClr>
+        </a:solidFill>
+        <a:round/>
+      </a:ln>
+    </cs:spPr>
+  </cs:downBar>
+  <cs:dropLine>
+    <cs:lnRef idx="0"/>
+    <cs:fillRef idx="0"/>
+    <cs:effectRef idx="0"/>
+    <cs:fontRef idx="minor">
+      <a:schemeClr val="tx1"/>
+    </cs:fontRef>
+    <cs:spPr>
+      <a:ln w="9525" cap="flat" cmpd="sng" algn="ctr">
+        <a:solidFill>
+          <a:schemeClr val="tx1">
+            <a:lumMod val="35000"/>
+            <a:lumOff val="65000"/>
+          </a:schemeClr>
+        </a:solidFill>
+        <a:round/>
+      </a:ln>
+    </cs:spPr>
+  </cs:dropLine>
+  <cs:errorBar>
+    <cs:lnRef idx="0"/>
+    <cs:fillRef idx="0"/>
+    <cs:effectRef idx="0"/>
+    <cs:fontRef idx="minor">
+      <a:schemeClr val="tx1"/>
+    </cs:fontRef>
+    <cs:spPr>
+      <a:ln w="9525" cap="flat" cmpd="sng" algn="ctr">
+        <a:solidFill>
+          <a:schemeClr val="tx1">
+            <a:lumMod val="65000"/>
+            <a:lumOff val="35000"/>
+          </a:schemeClr>
+        </a:solidFill>
+        <a:round/>
+      </a:ln>
+    </cs:spPr>
+  </cs:errorBar>
+  <cs:floor>
+    <cs:lnRef idx="0"/>
+    <cs:fillRef idx="0"/>
+    <cs:effectRef idx="0"/>
+    <cs:fontRef idx="minor">
+      <a:schemeClr val="tx1"/>
+    </cs:fontRef>
+    <cs:spPr>
+      <a:noFill/>
+      <a:ln>
+        <a:noFill/>
+      </a:ln>
+    </cs:spPr>
+  </cs:floor>
+  <cs:gridlineMajor>
+    <cs:lnRef idx="0"/>
+    <cs:fillRef idx="0"/>
+    <cs:effectRef idx="0"/>
+    <cs:fontRef idx="minor">
+      <a:schemeClr val="tx1"/>
+    </cs:fontRef>
+    <cs:spPr>
+      <a:ln w="9525" cap="flat" cmpd="sng" algn="ctr">
+        <a:solidFill>
+          <a:schemeClr val="tx1">
+            <a:lumMod val="15000"/>
+            <a:lumOff val="85000"/>
+          </a:schemeClr>
+        </a:solidFill>
+        <a:round/>
+      </a:ln>
+    </cs:spPr>
+  </cs:gridlineMajor>
+  <cs:gridlineMinor>
+    <cs:lnRef idx="0"/>
+    <cs:fillRef idx="0"/>
+    <cs:effectRef idx="0"/>
+    <cs:fontRef idx="minor">
+      <a:schemeClr val="tx1"/>
+    </cs:fontRef>
+    <cs:spPr>
+      <a:ln w="9525" cap="flat" cmpd="sng" algn="ctr">
+        <a:solidFill>
+          <a:schemeClr val="tx1">
+            <a:lumMod val="5000"/>
+            <a:lumOff val="95000"/>
+          </a:schemeClr>
+        </a:solidFill>
+        <a:round/>
+      </a:ln>
+    </cs:spPr>
+  </cs:gridlineMinor>
+  <cs:hiLoLine>
+    <cs:lnRef idx="0"/>
+    <cs:fillRef idx="0"/>
+    <cs:effectRef idx="0"/>
+    <cs:fontRef idx="minor">
+      <a:schemeClr val="tx1"/>
+    </cs:fontRef>
+    <cs:spPr>
+      <a:ln w="9525" cap="flat" cmpd="sng" algn="ctr">
+        <a:solidFill>
+          <a:schemeClr val="tx1">
+            <a:lumMod val="50000"/>
+            <a:lumOff val="50000"/>
+          </a:schemeClr>
+        </a:solidFill>
+        <a:round/>
+      </a:ln>
+    </cs:spPr>
+  </cs:hiLoLine>
+  <cs:leaderLine>
+    <cs:lnRef idx="0"/>
+    <cs:fillRef idx="0"/>
+    <cs:effectRef idx="0"/>
+    <cs:fontRef idx="minor">
+      <a:schemeClr val="tx1"/>
+    </cs:fontRef>
+    <cs:spPr>
+      <a:ln w="9525" cap="flat" cmpd="sng" algn="ctr">
+        <a:solidFill>
+          <a:schemeClr val="tx1">
+            <a:lumMod val="35000"/>
+            <a:lumOff val="65000"/>
+          </a:schemeClr>
+        </a:solidFill>
+        <a:round/>
+      </a:ln>
+    </cs:spPr>
+  </cs:leaderLine>
+  <cs:legend>
+    <cs:lnRef idx="0"/>
+    <cs:fillRef idx="0"/>
+    <cs:effectRef idx="0"/>
+    <cs:fontRef idx="minor">
+      <a:schemeClr val="tx1">
+        <a:lumMod val="65000"/>
+        <a:lumOff val="35000"/>
+      </a:schemeClr>
+    </cs:fontRef>
+    <cs:defRPr sz="1197" kern="1200"/>
+  </cs:legend>
+  <cs:plotArea mods="allowNoFillOverride allowNoLineOverride">
+    <cs:lnRef idx="0"/>
+    <cs:fillRef idx="0"/>
+    <cs:effectRef idx="0"/>
+    <cs:fontRef idx="minor">
+      <a:schemeClr val="tx1"/>
+    </cs:fontRef>
+  </cs:plotArea>
+  <cs:plotArea3D mods="allowNoFillOverride allowNoLineOverride">
+    <cs:lnRef idx="0"/>
+    <cs:fillRef idx="0"/>
+    <cs:effectRef idx="0"/>
+    <cs:fontRef idx="minor">
+      <a:schemeClr val="tx1"/>
+    </cs:fontRef>
+  </cs:plotArea3D>
+  <cs:seriesAxis>
+    <cs:lnRef idx="0"/>
+    <cs:fillRef idx="0"/>
+    <cs:effectRef idx="0"/>
+    <cs:fontRef idx="minor">
+      <a:schemeClr val="tx1">
+        <a:lumMod val="65000"/>
+        <a:lumOff val="35000"/>
+      </a:schemeClr>
+    </cs:fontRef>
+    <cs:defRPr sz="1197" kern="1200"/>
+  </cs:seriesAxis>
+  <cs:seriesLine>
+    <cs:lnRef idx="0"/>
+    <cs:fillRef idx="0"/>
+    <cs:effectRef idx="0"/>
+    <cs:fontRef idx="minor">
+      <a:schemeClr val="tx1"/>
+    </cs:fontRef>
+    <cs:spPr>
+      <a:ln w="9525" cap="flat" cmpd="sng" algn="ctr">
+        <a:solidFill>
+          <a:schemeClr val="tx1">
+            <a:lumMod val="35000"/>
+            <a:lumOff val="65000"/>
+          </a:schemeClr>
+        </a:solidFill>
+        <a:round/>
+      </a:ln>
+    </cs:spPr>
+  </cs:seriesLine>
+  <cs:title>
+    <cs:lnRef idx="0"/>
+    <cs:fillRef idx="0"/>
+    <cs:effectRef idx="0"/>
+    <cs:fontRef idx="minor">
+      <a:schemeClr val="tx1">
+        <a:lumMod val="65000"/>
+        <a:lumOff val="35000"/>
+      </a:schemeClr>
+    </cs:fontRef>
+    <cs:defRPr sz="1862" b="0" kern="1200" spc="0" baseline="0"/>
+  </cs:title>
+  <cs:trendline>
+    <cs:lnRef idx="0">
+      <cs:styleClr val="auto"/>
+    </cs:lnRef>
+    <cs:fillRef idx="0"/>
+    <cs:effectRef idx="0"/>
+    <cs:fontRef idx="minor">
+      <a:schemeClr val="tx1"/>
+    </cs:fontRef>
+    <cs:spPr>
+      <a:ln w="19050" cap="rnd">
+        <a:solidFill>
+          <a:schemeClr val="phClr"/>
+        </a:solidFill>
+        <a:prstDash val="sysDot"/>
+      </a:ln>
+    </cs:spPr>
+  </cs:trendline>
+  <cs:trendlineLabel>
+    <cs:lnRef idx="0"/>
+    <cs:fillRef idx="0"/>
+    <cs:effectRef idx="0"/>
+    <cs:fontRef idx="minor">
+      <a:schemeClr val="tx1">
+        <a:lumMod val="65000"/>
+        <a:lumOff val="35000"/>
+      </a:schemeClr>
+    </cs:fontRef>
+    <cs:defRPr sz="1197" kern="1200"/>
+  </cs:trendlineLabel>
+  <cs:upBar>
+    <cs:lnRef idx="0"/>
+    <cs:fillRef idx="0"/>
+    <cs:effectRef idx="0"/>
+    <cs:fontRef idx="minor">
+      <a:schemeClr val="tx1"/>
+    </cs:fontRef>
+    <cs:spPr>
+      <a:solidFill>
+        <a:schemeClr val="lt1"/>
+      </a:solidFill>
+      <a:ln w="9525" cap="flat" cmpd="sng" algn="ctr">
+        <a:solidFill>
+          <a:schemeClr val="tx1">
+            <a:lumMod val="65000"/>
+            <a:lumOff val="35000"/>
+          </a:schemeClr>
+        </a:solidFill>
+        <a:round/>
+      </a:ln>
+    </cs:spPr>
+  </cs:upBar>
+  <cs:valueAxis>
+    <cs:lnRef idx="0"/>
+    <cs:fillRef idx="0"/>
+    <cs:effectRef idx="0"/>
+    <cs:fontRef idx="minor">
+      <a:schemeClr val="tx1">
+        <a:lumMod val="65000"/>
+        <a:lumOff val="35000"/>
+      </a:schemeClr>
+    </cs:fontRef>
+    <cs:spPr>
+      <a:ln w="9525" cap="flat" cmpd="sng" algn="ctr">
+        <a:solidFill>
+          <a:schemeClr val="tx1">
+            <a:lumMod val="25000"/>
+            <a:lumOff val="75000"/>
+          </a:schemeClr>
+        </a:solidFill>
+        <a:round/>
+      </a:ln>
+    </cs:spPr>
+    <cs:defRPr sz="1197" kern="1200"/>
+  </cs:valueAxis>
+  <cs:wall>
+    <cs:lnRef idx="0"/>
+    <cs:fillRef idx="0"/>
+    <cs:effectRef idx="0"/>
+    <cs:fontRef idx="minor">
+      <a:schemeClr val="tx1"/>
+    </cs:fontRef>
+    <cs:spPr>
+      <a:noFill/>
+      <a:ln>
+        <a:noFill/>
+      </a:ln>
+    </cs:spPr>
+  </cs:wall>
+</cs:chartStyle>
+</file>
+
 <file path=ppt/slideLayouts/slideLayout1.xml><?xml version="1.0" encoding="utf-8"?>
 <p:sldLayout xmlns:a="http://schemas.openxmlformats.org/drawingml/2006/main" xmlns:r="http://schemas.openxmlformats.org/officeDocument/2006/relationships" xmlns:p="http://schemas.openxmlformats.org/presentationml/2006/main" type="title" preserve="1">
   <p:cSld name="タイトル スライド">
@@ -271,7 +3330,7 @@
           <a:p>
             <a:fld id="{338BEB56-2203-4F1F-BF95-3372EF3570AD}" type="datetimeFigureOut">
               <a:rPr kumimoji="1" lang="ja-JP" altLang="en-US" smtClean="0"/>
-              <a:t>2026/3/24</a:t>
+              <a:t>2026/5/9</a:t>
             </a:fld>
             <a:endParaRPr kumimoji="1" lang="ja-JP" altLang="en-US"/>
           </a:p>
@@ -455,7 +3514,7 @@
           <a:p>
             <a:fld id="{338BEB56-2203-4F1F-BF95-3372EF3570AD}" type="datetimeFigureOut">
               <a:rPr kumimoji="1" lang="ja-JP" altLang="en-US" smtClean="0"/>
-              <a:t>2026/3/24</a:t>
+              <a:t>2026/5/9</a:t>
             </a:fld>
             <a:endParaRPr kumimoji="1" lang="ja-JP" altLang="en-US"/>
           </a:p>
@@ -672,7 +3731,7 @@
           <a:p>
             <a:fld id="{338BEB56-2203-4F1F-BF95-3372EF3570AD}" type="datetimeFigureOut">
               <a:rPr kumimoji="1" lang="ja-JP" altLang="en-US" smtClean="0"/>
-              <a:t>2026/3/24</a:t>
+              <a:t>2026/5/9</a:t>
             </a:fld>
             <a:endParaRPr kumimoji="1" lang="ja-JP" altLang="en-US"/>
           </a:p>
@@ -962,7 +4021,7 @@
           <a:p>
             <a:fld id="{338BEB56-2203-4F1F-BF95-3372EF3570AD}" type="datetimeFigureOut">
               <a:rPr kumimoji="1" lang="ja-JP" altLang="en-US" smtClean="0"/>
-              <a:t>2026/3/24</a:t>
+              <a:t>2026/5/9</a:t>
             </a:fld>
             <a:endParaRPr kumimoji="1" lang="ja-JP" altLang="en-US"/>
           </a:p>
@@ -1257,7 +4316,7 @@
           <a:p>
             <a:fld id="{338BEB56-2203-4F1F-BF95-3372EF3570AD}" type="datetimeFigureOut">
               <a:rPr kumimoji="1" lang="ja-JP" altLang="en-US" smtClean="0"/>
-              <a:t>2026/3/24</a:t>
+              <a:t>2026/5/9</a:t>
             </a:fld>
             <a:endParaRPr kumimoji="1" lang="ja-JP" altLang="en-US"/>
           </a:p>
@@ -1492,7 +4551,7 @@
           <a:p>
             <a:fld id="{338BEB56-2203-4F1F-BF95-3372EF3570AD}" type="datetimeFigureOut">
               <a:rPr kumimoji="1" lang="ja-JP" altLang="en-US" smtClean="0"/>
-              <a:t>2026/3/24</a:t>
+              <a:t>2026/5/9</a:t>
             </a:fld>
             <a:endParaRPr kumimoji="1" lang="ja-JP" altLang="en-US"/>
           </a:p>
@@ -2203,7 +5262,7 @@
           <a:p>
             <a:fld id="{338BEB56-2203-4F1F-BF95-3372EF3570AD}" type="datetimeFigureOut">
               <a:rPr kumimoji="1" lang="ja-JP" altLang="en-US" smtClean="0"/>
-              <a:t>2026/3/24</a:t>
+              <a:t>2026/5/9</a:t>
             </a:fld>
             <a:endParaRPr kumimoji="1" lang="ja-JP" altLang="en-US"/>
           </a:p>
@@ -2312,7 +5371,7 @@
           <a:p>
             <a:fld id="{338BEB56-2203-4F1F-BF95-3372EF3570AD}" type="datetimeFigureOut">
               <a:rPr kumimoji="1" lang="ja-JP" altLang="en-US" smtClean="0"/>
-              <a:t>2026/3/24</a:t>
+              <a:t>2026/5/9</a:t>
             </a:fld>
             <a:endParaRPr kumimoji="1" lang="ja-JP" altLang="en-US"/>
           </a:p>
@@ -2496,7 +5555,7 @@
           <a:p>
             <a:fld id="{338BEB56-2203-4F1F-BF95-3372EF3570AD}" type="datetimeFigureOut">
               <a:rPr kumimoji="1" lang="ja-JP" altLang="en-US" smtClean="0"/>
-              <a:t>2026/3/24</a:t>
+              <a:t>2026/5/9</a:t>
             </a:fld>
             <a:endParaRPr kumimoji="1" lang="ja-JP" altLang="en-US"/>
           </a:p>
@@ -2591,7 +5650,7 @@
           <a:p>
             <a:fld id="{338BEB56-2203-4F1F-BF95-3372EF3570AD}" type="datetimeFigureOut">
               <a:rPr kumimoji="1" lang="ja-JP" altLang="en-US" smtClean="0"/>
-              <a:t>2026/3/24</a:t>
+              <a:t>2026/5/9</a:t>
             </a:fld>
             <a:endParaRPr kumimoji="1" lang="ja-JP" altLang="en-US"/>
           </a:p>
@@ -2838,7 +5897,7 @@
           <a:p>
             <a:fld id="{338BEB56-2203-4F1F-BF95-3372EF3570AD}" type="datetimeFigureOut">
               <a:rPr kumimoji="1" lang="ja-JP" altLang="en-US" smtClean="0"/>
-              <a:t>2026/3/24</a:t>
+              <a:t>2026/5/9</a:t>
             </a:fld>
             <a:endParaRPr kumimoji="1" lang="ja-JP" altLang="en-US"/>
           </a:p>
@@ -4115,6 +7174,117 @@
           <a:chExt cx="0" cy="0"/>
         </a:xfrm>
       </p:grpSpPr>
+      <p:grpSp>
+        <p:nvGrpSpPr>
+          <p:cNvPr id="4" name="グループ化 3">
+            <a:extLst>
+              <a:ext uri="{FF2B5EF4-FFF2-40B4-BE49-F238E27FC236}">
+                <a16:creationId xmlns:a16="http://schemas.microsoft.com/office/drawing/2014/main" id="{0DDDCB14-AFD7-FE3D-965B-9AB5ABE5CE4B}"/>
+              </a:ext>
+            </a:extLst>
+          </p:cNvPr>
+          <p:cNvGrpSpPr/>
+          <p:nvPr/>
+        </p:nvGrpSpPr>
+        <p:grpSpPr>
+          <a:xfrm>
+            <a:off x="828675" y="2862073"/>
+            <a:ext cx="10534650" cy="3335528"/>
+            <a:chOff x="828675" y="2862073"/>
+            <a:chExt cx="10534650" cy="3335528"/>
+          </a:xfrm>
+        </p:grpSpPr>
+        <p:graphicFrame>
+          <p:nvGraphicFramePr>
+            <p:cNvPr id="2" name="コンテンツ プレースホルダー 9">
+              <a:extLst>
+                <a:ext uri="{FF2B5EF4-FFF2-40B4-BE49-F238E27FC236}">
+                  <a16:creationId xmlns:a16="http://schemas.microsoft.com/office/drawing/2014/main" id="{308B0134-8DBE-4B35-7249-452AF028909A}"/>
+                </a:ext>
+              </a:extLst>
+            </p:cNvPr>
+            <p:cNvGraphicFramePr>
+              <a:graphicFrameLocks/>
+            </p:cNvGraphicFramePr>
+            <p:nvPr>
+              <p:extLst>
+                <p:ext uri="{D42A27DB-BD31-4B8C-83A1-F6EECF244321}">
+                  <p14:modId xmlns:p14="http://schemas.microsoft.com/office/powerpoint/2010/main" val="717148022"/>
+                </p:ext>
+              </p:extLst>
+            </p:nvPr>
+          </p:nvGraphicFramePr>
+          <p:xfrm>
+            <a:off x="828675" y="2862073"/>
+            <a:ext cx="5191125" cy="3335528"/>
+          </p:xfrm>
+          <a:graphic>
+            <a:graphicData uri="http://schemas.openxmlformats.org/drawingml/2006/chart">
+              <c:chart xmlns:c="http://schemas.openxmlformats.org/drawingml/2006/chart" xmlns:r="http://schemas.openxmlformats.org/officeDocument/2006/relationships" r:id="rId2"/>
+            </a:graphicData>
+          </a:graphic>
+        </p:graphicFrame>
+        <p:graphicFrame>
+          <p:nvGraphicFramePr>
+            <p:cNvPr id="3" name="コンテンツ プレースホルダー 12">
+              <a:extLst>
+                <a:ext uri="{FF2B5EF4-FFF2-40B4-BE49-F238E27FC236}">
+                  <a16:creationId xmlns:a16="http://schemas.microsoft.com/office/drawing/2014/main" id="{F28F9C98-F5D0-D2DD-E9D2-1D04C85052F1}"/>
+                </a:ext>
+              </a:extLst>
+            </p:cNvPr>
+            <p:cNvGraphicFramePr>
+              <a:graphicFrameLocks/>
+            </p:cNvGraphicFramePr>
+            <p:nvPr>
+              <p:extLst>
+                <p:ext uri="{D42A27DB-BD31-4B8C-83A1-F6EECF244321}">
+                  <p14:modId xmlns:p14="http://schemas.microsoft.com/office/powerpoint/2010/main" val="2835203663"/>
+                </p:ext>
+              </p:extLst>
+            </p:nvPr>
+          </p:nvGraphicFramePr>
+          <p:xfrm>
+            <a:off x="6172200" y="2862073"/>
+            <a:ext cx="5191125" cy="3335528"/>
+          </p:xfrm>
+          <a:graphic>
+            <a:graphicData uri="http://schemas.openxmlformats.org/drawingml/2006/chart">
+              <c:chart xmlns:c="http://schemas.openxmlformats.org/drawingml/2006/chart" xmlns:r="http://schemas.openxmlformats.org/officeDocument/2006/relationships" r:id="rId3"/>
+            </a:graphicData>
+          </a:graphic>
+        </p:graphicFrame>
+      </p:grpSp>
+    </p:spTree>
+    <p:extLst>
+      <p:ext uri="{BB962C8B-B14F-4D97-AF65-F5344CB8AC3E}">
+        <p14:creationId xmlns:p14="http://schemas.microsoft.com/office/powerpoint/2010/main" val="632304879"/>
+      </p:ext>
+    </p:extLst>
+  </p:cSld>
+  <p:clrMapOvr>
+    <a:masterClrMapping/>
+  </p:clrMapOvr>
+</p:sld>
+</file>
+
+<file path=ppt/slides/slide3.xml><?xml version="1.0" encoding="utf-8"?>
+<p:sld xmlns:a="http://schemas.openxmlformats.org/drawingml/2006/main" xmlns:r="http://schemas.openxmlformats.org/officeDocument/2006/relationships" xmlns:p="http://schemas.openxmlformats.org/presentationml/2006/main">
+  <p:cSld>
+    <p:spTree>
+      <p:nvGrpSpPr>
+        <p:cNvPr id="1" name=""/>
+        <p:cNvGrpSpPr/>
+        <p:nvPr/>
+      </p:nvGrpSpPr>
+      <p:grpSpPr>
+        <a:xfrm>
+          <a:off x="0" y="0"/>
+          <a:ext cx="0" cy="0"/>
+          <a:chOff x="0" y="0"/>
+          <a:chExt cx="0" cy="0"/>
+        </a:xfrm>
+      </p:grpSpPr>
       <p:pic>
         <p:nvPicPr>
           <p:cNvPr id="3" name="図 2">
@@ -4158,7 +7328,7 @@
 </p:sld>
 </file>
 
-<file path=ppt/slides/slide3.xml><?xml version="1.0" encoding="utf-8"?>
+<file path=ppt/slides/slide4.xml><?xml version="1.0" encoding="utf-8"?>
 <p:sld xmlns:a="http://schemas.openxmlformats.org/drawingml/2006/main" xmlns:r="http://schemas.openxmlformats.org/officeDocument/2006/relationships" xmlns:p="http://schemas.openxmlformats.org/presentationml/2006/main">
   <p:cSld>
     <p:spTree>
@@ -4218,7 +7388,7 @@
 </p:sld>
 </file>
 
-<file path=ppt/slides/slide4.xml><?xml version="1.0" encoding="utf-8"?>
+<file path=ppt/slides/slide5.xml><?xml version="1.0" encoding="utf-8"?>
 <p:sld xmlns:a="http://schemas.openxmlformats.org/drawingml/2006/main" xmlns:r="http://schemas.openxmlformats.org/officeDocument/2006/relationships" xmlns:p="http://schemas.openxmlformats.org/presentationml/2006/main">
   <p:cSld>
     <p:spTree>
@@ -4278,7 +7448,7 @@
 </p:sld>
 </file>
 
-<file path=ppt/slides/slide5.xml><?xml version="1.0" encoding="utf-8"?>
+<file path=ppt/slides/slide6.xml><?xml version="1.0" encoding="utf-8"?>
 <p:sld xmlns:a="http://schemas.openxmlformats.org/drawingml/2006/main" xmlns:r="http://schemas.openxmlformats.org/officeDocument/2006/relationships" xmlns:p="http://schemas.openxmlformats.org/presentationml/2006/main">
   <p:cSld>
     <p:spTree>
@@ -4684,18 +7854,18 @@
 </file>
 
 <file path=customXml/item2.xml><?xml version="1.0" encoding="utf-8"?>
+<p:properties xmlns:p="http://schemas.microsoft.com/office/2006/metadata/properties" xmlns:xsi="http://www.w3.org/2001/XMLSchema-instance" xmlns:pc="http://schemas.microsoft.com/office/infopath/2007/PartnerControls">
+  <documentManagement/>
+</p:properties>
+</file>
+
+<file path=customXml/item3.xml><?xml version="1.0" encoding="utf-8"?>
 <?mso-contentType ?>
 <FormTemplates xmlns="http://schemas.microsoft.com/sharepoint/v3/contenttype/forms">
   <Display>DocumentLibraryForm</Display>
   <Edit>DocumentLibraryForm</Edit>
   <New>DocumentLibraryForm</New>
 </FormTemplates>
-</file>
-
-<file path=customXml/item3.xml><?xml version="1.0" encoding="utf-8"?>
-<p:properties xmlns:p="http://schemas.microsoft.com/office/2006/metadata/properties" xmlns:xsi="http://www.w3.org/2001/XMLSchema-instance" xmlns:pc="http://schemas.microsoft.com/office/infopath/2007/PartnerControls">
-  <documentManagement/>
-</p:properties>
 </file>
 
 <file path=customXml/itemProps1.xml><?xml version="1.0" encoding="utf-8"?>
@@ -4717,14 +7887,6 @@
 </file>
 
 <file path=customXml/itemProps2.xml><?xml version="1.0" encoding="utf-8"?>
-<ds:datastoreItem xmlns:ds="http://schemas.openxmlformats.org/officeDocument/2006/customXml" ds:itemID="{AB851738-DD37-4E03-A76B-B763E2757B0B}">
-  <ds:schemaRefs>
-    <ds:schemaRef ds:uri="http://schemas.microsoft.com/sharepoint/v3/contenttype/forms"/>
-  </ds:schemaRefs>
-</ds:datastoreItem>
-</file>
-
-<file path=customXml/itemProps3.xml><?xml version="1.0" encoding="utf-8"?>
 <ds:datastoreItem xmlns:ds="http://schemas.openxmlformats.org/officeDocument/2006/customXml" ds:itemID="{5D972508-A93B-4CFB-9C27-BD808F279085}">
   <ds:schemaRefs>
     <ds:schemaRef ds:uri="c92ae596-f2ea-4fe5-8164-7ef5be6a5706"/>
@@ -4738,4 +7900,12 @@
     <ds:schemaRef ds:uri="http://purl.org/dc/elements/1.1/"/>
   </ds:schemaRefs>
 </ds:datastoreItem>
+</file>
+
+<file path=customXml/itemProps3.xml><?xml version="1.0" encoding="utf-8"?>
+<ds:datastoreItem xmlns:ds="http://schemas.openxmlformats.org/officeDocument/2006/customXml" ds:itemID="{AB851738-DD37-4E03-A76B-B763E2757B0B}">
+  <ds:schemaRefs>
+    <ds:schemaRef ds:uri="http://schemas.microsoft.com/sharepoint/v3/contenttype/forms"/>
+  </ds:schemaRefs>
+</ds:datastoreItem>
 </file>
--- a/images/dataintro_fig.pptx
+++ b/images/dataintro_fig.pptx
@@ -6,11 +6,12 @@
   </p:sldMasterIdLst>
   <p:sldIdLst>
     <p:sldId id="257" r:id="rId5"/>
-    <p:sldId id="262" r:id="rId6"/>
-    <p:sldId id="261" r:id="rId7"/>
-    <p:sldId id="259" r:id="rId8"/>
-    <p:sldId id="258" r:id="rId9"/>
-    <p:sldId id="260" r:id="rId10"/>
+    <p:sldId id="263" r:id="rId6"/>
+    <p:sldId id="262" r:id="rId7"/>
+    <p:sldId id="261" r:id="rId8"/>
+    <p:sldId id="259" r:id="rId9"/>
+    <p:sldId id="258" r:id="rId10"/>
+    <p:sldId id="260" r:id="rId11"/>
   </p:sldIdLst>
   <p:sldSz cx="12192000" cy="6858000"/>
   <p:notesSz cx="6858000" cy="9144000"/>
@@ -3330,7 +3331,7 @@
           <a:p>
             <a:fld id="{338BEB56-2203-4F1F-BF95-3372EF3570AD}" type="datetimeFigureOut">
               <a:rPr kumimoji="1" lang="ja-JP" altLang="en-US" smtClean="0"/>
-              <a:t>2026/5/9</a:t>
+              <a:t>2026/5/12</a:t>
             </a:fld>
             <a:endParaRPr kumimoji="1" lang="ja-JP" altLang="en-US"/>
           </a:p>
@@ -3514,7 +3515,7 @@
           <a:p>
             <a:fld id="{338BEB56-2203-4F1F-BF95-3372EF3570AD}" type="datetimeFigureOut">
               <a:rPr kumimoji="1" lang="ja-JP" altLang="en-US" smtClean="0"/>
-              <a:t>2026/5/9</a:t>
+              <a:t>2026/5/12</a:t>
             </a:fld>
             <a:endParaRPr kumimoji="1" lang="ja-JP" altLang="en-US"/>
           </a:p>
@@ -3731,7 +3732,7 @@
           <a:p>
             <a:fld id="{338BEB56-2203-4F1F-BF95-3372EF3570AD}" type="datetimeFigureOut">
               <a:rPr kumimoji="1" lang="ja-JP" altLang="en-US" smtClean="0"/>
-              <a:t>2026/5/9</a:t>
+              <a:t>2026/5/12</a:t>
             </a:fld>
             <a:endParaRPr kumimoji="1" lang="ja-JP" altLang="en-US"/>
           </a:p>
@@ -4021,7 +4022,7 @@
           <a:p>
             <a:fld id="{338BEB56-2203-4F1F-BF95-3372EF3570AD}" type="datetimeFigureOut">
               <a:rPr kumimoji="1" lang="ja-JP" altLang="en-US" smtClean="0"/>
-              <a:t>2026/5/9</a:t>
+              <a:t>2026/5/12</a:t>
             </a:fld>
             <a:endParaRPr kumimoji="1" lang="ja-JP" altLang="en-US"/>
           </a:p>
@@ -4316,7 +4317,7 @@
           <a:p>
             <a:fld id="{338BEB56-2203-4F1F-BF95-3372EF3570AD}" type="datetimeFigureOut">
               <a:rPr kumimoji="1" lang="ja-JP" altLang="en-US" smtClean="0"/>
-              <a:t>2026/5/9</a:t>
+              <a:t>2026/5/12</a:t>
             </a:fld>
             <a:endParaRPr kumimoji="1" lang="ja-JP" altLang="en-US"/>
           </a:p>
@@ -4551,7 +4552,7 @@
           <a:p>
             <a:fld id="{338BEB56-2203-4F1F-BF95-3372EF3570AD}" type="datetimeFigureOut">
               <a:rPr kumimoji="1" lang="ja-JP" altLang="en-US" smtClean="0"/>
-              <a:t>2026/5/9</a:t>
+              <a:t>2026/5/12</a:t>
             </a:fld>
             <a:endParaRPr kumimoji="1" lang="ja-JP" altLang="en-US"/>
           </a:p>
@@ -5262,7 +5263,7 @@
           <a:p>
             <a:fld id="{338BEB56-2203-4F1F-BF95-3372EF3570AD}" type="datetimeFigureOut">
               <a:rPr kumimoji="1" lang="ja-JP" altLang="en-US" smtClean="0"/>
-              <a:t>2026/5/9</a:t>
+              <a:t>2026/5/12</a:t>
             </a:fld>
             <a:endParaRPr kumimoji="1" lang="ja-JP" altLang="en-US"/>
           </a:p>
@@ -5371,7 +5372,7 @@
           <a:p>
             <a:fld id="{338BEB56-2203-4F1F-BF95-3372EF3570AD}" type="datetimeFigureOut">
               <a:rPr kumimoji="1" lang="ja-JP" altLang="en-US" smtClean="0"/>
-              <a:t>2026/5/9</a:t>
+              <a:t>2026/5/12</a:t>
             </a:fld>
             <a:endParaRPr kumimoji="1" lang="ja-JP" altLang="en-US"/>
           </a:p>
@@ -5555,7 +5556,7 @@
           <a:p>
             <a:fld id="{338BEB56-2203-4F1F-BF95-3372EF3570AD}" type="datetimeFigureOut">
               <a:rPr kumimoji="1" lang="ja-JP" altLang="en-US" smtClean="0"/>
-              <a:t>2026/5/9</a:t>
+              <a:t>2026/5/12</a:t>
             </a:fld>
             <a:endParaRPr kumimoji="1" lang="ja-JP" altLang="en-US"/>
           </a:p>
@@ -5650,7 +5651,7 @@
           <a:p>
             <a:fld id="{338BEB56-2203-4F1F-BF95-3372EF3570AD}" type="datetimeFigureOut">
               <a:rPr kumimoji="1" lang="ja-JP" altLang="en-US" smtClean="0"/>
-              <a:t>2026/5/9</a:t>
+              <a:t>2026/5/12</a:t>
             </a:fld>
             <a:endParaRPr kumimoji="1" lang="ja-JP" altLang="en-US"/>
           </a:p>
@@ -5897,7 +5898,7 @@
           <a:p>
             <a:fld id="{338BEB56-2203-4F1F-BF95-3372EF3570AD}" type="datetimeFigureOut">
               <a:rPr kumimoji="1" lang="ja-JP" altLang="en-US" smtClean="0"/>
-              <a:t>2026/5/9</a:t>
+              <a:t>2026/5/12</a:t>
             </a:fld>
             <a:endParaRPr kumimoji="1" lang="ja-JP" altLang="en-US"/>
           </a:p>
@@ -7174,6 +7175,66 @@
           <a:chExt cx="0" cy="0"/>
         </a:xfrm>
       </p:grpSpPr>
+      <p:pic>
+        <p:nvPicPr>
+          <p:cNvPr id="3" name="図 2">
+            <a:extLst>
+              <a:ext uri="{FF2B5EF4-FFF2-40B4-BE49-F238E27FC236}">
+                <a16:creationId xmlns:a16="http://schemas.microsoft.com/office/drawing/2014/main" id="{29098351-38A7-C854-9498-A5A9D7BB4BFB}"/>
+              </a:ext>
+            </a:extLst>
+          </p:cNvPr>
+          <p:cNvPicPr>
+            <a:picLocks noChangeAspect="1"/>
+          </p:cNvPicPr>
+          <p:nvPr/>
+        </p:nvPicPr>
+        <p:blipFill>
+          <a:blip r:embed="rId2"/>
+          <a:stretch>
+            <a:fillRect/>
+          </a:stretch>
+        </p:blipFill>
+        <p:spPr>
+          <a:xfrm>
+            <a:off x="4724208" y="1480865"/>
+            <a:ext cx="2743583" cy="3896269"/>
+          </a:xfrm>
+          <a:prstGeom prst="rect">
+            <a:avLst/>
+          </a:prstGeom>
+        </p:spPr>
+      </p:pic>
+    </p:spTree>
+    <p:extLst>
+      <p:ext uri="{BB962C8B-B14F-4D97-AF65-F5344CB8AC3E}">
+        <p14:creationId xmlns:p14="http://schemas.microsoft.com/office/powerpoint/2010/main" val="2178757191"/>
+      </p:ext>
+    </p:extLst>
+  </p:cSld>
+  <p:clrMapOvr>
+    <a:masterClrMapping/>
+  </p:clrMapOvr>
+</p:sld>
+</file>
+
+<file path=ppt/slides/slide3.xml><?xml version="1.0" encoding="utf-8"?>
+<p:sld xmlns:a="http://schemas.openxmlformats.org/drawingml/2006/main" xmlns:r="http://schemas.openxmlformats.org/officeDocument/2006/relationships" xmlns:p="http://schemas.openxmlformats.org/presentationml/2006/main">
+  <p:cSld>
+    <p:spTree>
+      <p:nvGrpSpPr>
+        <p:cNvPr id="1" name=""/>
+        <p:cNvGrpSpPr/>
+        <p:nvPr/>
+      </p:nvGrpSpPr>
+      <p:grpSpPr>
+        <a:xfrm>
+          <a:off x="0" y="0"/>
+          <a:ext cx="0" cy="0"/>
+          <a:chOff x="0" y="0"/>
+          <a:chExt cx="0" cy="0"/>
+        </a:xfrm>
+      </p:grpSpPr>
       <p:grpSp>
         <p:nvGrpSpPr>
           <p:cNvPr id="4" name="グループ化 3">
@@ -7268,7 +7329,7 @@
 </p:sld>
 </file>
 
-<file path=ppt/slides/slide3.xml><?xml version="1.0" encoding="utf-8"?>
+<file path=ppt/slides/slide4.xml><?xml version="1.0" encoding="utf-8"?>
 <p:sld xmlns:a="http://schemas.openxmlformats.org/drawingml/2006/main" xmlns:r="http://schemas.openxmlformats.org/officeDocument/2006/relationships" xmlns:p="http://schemas.openxmlformats.org/presentationml/2006/main">
   <p:cSld>
     <p:spTree>
@@ -7328,7 +7389,7 @@
 </p:sld>
 </file>
 
-<file path=ppt/slides/slide4.xml><?xml version="1.0" encoding="utf-8"?>
+<file path=ppt/slides/slide5.xml><?xml version="1.0" encoding="utf-8"?>
 <p:sld xmlns:a="http://schemas.openxmlformats.org/drawingml/2006/main" xmlns:r="http://schemas.openxmlformats.org/officeDocument/2006/relationships" xmlns:p="http://schemas.openxmlformats.org/presentationml/2006/main">
   <p:cSld>
     <p:spTree>
@@ -7388,7 +7449,7 @@
 </p:sld>
 </file>
 
-<file path=ppt/slides/slide5.xml><?xml version="1.0" encoding="utf-8"?>
+<file path=ppt/slides/slide6.xml><?xml version="1.0" encoding="utf-8"?>
 <p:sld xmlns:a="http://schemas.openxmlformats.org/drawingml/2006/main" xmlns:r="http://schemas.openxmlformats.org/officeDocument/2006/relationships" xmlns:p="http://schemas.openxmlformats.org/presentationml/2006/main">
   <p:cSld>
     <p:spTree>
@@ -7448,7 +7509,7 @@
 </p:sld>
 </file>
 
-<file path=ppt/slides/slide6.xml><?xml version="1.0" encoding="utf-8"?>
+<file path=ppt/slides/slide7.xml><?xml version="1.0" encoding="utf-8"?>
 <p:sld xmlns:a="http://schemas.openxmlformats.org/drawingml/2006/main" xmlns:r="http://schemas.openxmlformats.org/officeDocument/2006/relationships" xmlns:p="http://schemas.openxmlformats.org/presentationml/2006/main">
   <p:cSld>
     <p:spTree>
@@ -7854,18 +7915,18 @@
 </file>
 
 <file path=customXml/item2.xml><?xml version="1.0" encoding="utf-8"?>
-<p:properties xmlns:p="http://schemas.microsoft.com/office/2006/metadata/properties" xmlns:xsi="http://www.w3.org/2001/XMLSchema-instance" xmlns:pc="http://schemas.microsoft.com/office/infopath/2007/PartnerControls">
-  <documentManagement/>
-</p:properties>
-</file>
-
-<file path=customXml/item3.xml><?xml version="1.0" encoding="utf-8"?>
 <?mso-contentType ?>
 <FormTemplates xmlns="http://schemas.microsoft.com/sharepoint/v3/contenttype/forms">
   <Display>DocumentLibraryForm</Display>
   <Edit>DocumentLibraryForm</Edit>
   <New>DocumentLibraryForm</New>
 </FormTemplates>
+</file>
+
+<file path=customXml/item3.xml><?xml version="1.0" encoding="utf-8"?>
+<p:properties xmlns:p="http://schemas.microsoft.com/office/2006/metadata/properties" xmlns:xsi="http://www.w3.org/2001/XMLSchema-instance" xmlns:pc="http://schemas.microsoft.com/office/infopath/2007/PartnerControls">
+  <documentManagement/>
+</p:properties>
 </file>
 
 <file path=customXml/itemProps1.xml><?xml version="1.0" encoding="utf-8"?>
@@ -7887,6 +7948,14 @@
 </file>
 
 <file path=customXml/itemProps2.xml><?xml version="1.0" encoding="utf-8"?>
+<ds:datastoreItem xmlns:ds="http://schemas.openxmlformats.org/officeDocument/2006/customXml" ds:itemID="{AB851738-DD37-4E03-A76B-B763E2757B0B}">
+  <ds:schemaRefs>
+    <ds:schemaRef ds:uri="http://schemas.microsoft.com/sharepoint/v3/contenttype/forms"/>
+  </ds:schemaRefs>
+</ds:datastoreItem>
+</file>
+
+<file path=customXml/itemProps3.xml><?xml version="1.0" encoding="utf-8"?>
 <ds:datastoreItem xmlns:ds="http://schemas.openxmlformats.org/officeDocument/2006/customXml" ds:itemID="{5D972508-A93B-4CFB-9C27-BD808F279085}">
   <ds:schemaRefs>
     <ds:schemaRef ds:uri="c92ae596-f2ea-4fe5-8164-7ef5be6a5706"/>
@@ -7900,12 +7969,4 @@
     <ds:schemaRef ds:uri="http://purl.org/dc/elements/1.1/"/>
   </ds:schemaRefs>
 </ds:datastoreItem>
-</file>
-
-<file path=customXml/itemProps3.xml><?xml version="1.0" encoding="utf-8"?>
-<ds:datastoreItem xmlns:ds="http://schemas.openxmlformats.org/officeDocument/2006/customXml" ds:itemID="{AB851738-DD37-4E03-A76B-B763E2757B0B}">
-  <ds:schemaRefs>
-    <ds:schemaRef ds:uri="http://schemas.microsoft.com/sharepoint/v3/contenttype/forms"/>
-  </ds:schemaRefs>
-</ds:datastoreItem>
 </file>
--- a/images/dataintro_fig.pptx
+++ b/images/dataintro_fig.pptx
@@ -12,6 +12,7 @@
     <p:sldId id="259" r:id="rId9"/>
     <p:sldId id="258" r:id="rId10"/>
     <p:sldId id="260" r:id="rId11"/>
+    <p:sldId id="264" r:id="rId12"/>
   </p:sldIdLst>
   <p:sldSz cx="12192000" cy="6858000"/>
   <p:notesSz cx="6858000" cy="9144000"/>
@@ -3331,7 +3332,7 @@
           <a:p>
             <a:fld id="{338BEB56-2203-4F1F-BF95-3372EF3570AD}" type="datetimeFigureOut">
               <a:rPr kumimoji="1" lang="ja-JP" altLang="en-US" smtClean="0"/>
-              <a:t>2026/5/12</a:t>
+              <a:t>2026/5/25</a:t>
             </a:fld>
             <a:endParaRPr kumimoji="1" lang="ja-JP" altLang="en-US"/>
           </a:p>
@@ -3515,7 +3516,7 @@
           <a:p>
             <a:fld id="{338BEB56-2203-4F1F-BF95-3372EF3570AD}" type="datetimeFigureOut">
               <a:rPr kumimoji="1" lang="ja-JP" altLang="en-US" smtClean="0"/>
-              <a:t>2026/5/12</a:t>
+              <a:t>2026/5/25</a:t>
             </a:fld>
             <a:endParaRPr kumimoji="1" lang="ja-JP" altLang="en-US"/>
           </a:p>
@@ -3732,7 +3733,7 @@
           <a:p>
             <a:fld id="{338BEB56-2203-4F1F-BF95-3372EF3570AD}" type="datetimeFigureOut">
               <a:rPr kumimoji="1" lang="ja-JP" altLang="en-US" smtClean="0"/>
-              <a:t>2026/5/12</a:t>
+              <a:t>2026/5/25</a:t>
             </a:fld>
             <a:endParaRPr kumimoji="1" lang="ja-JP" altLang="en-US"/>
           </a:p>
@@ -4022,7 +4023,7 @@
           <a:p>
             <a:fld id="{338BEB56-2203-4F1F-BF95-3372EF3570AD}" type="datetimeFigureOut">
               <a:rPr kumimoji="1" lang="ja-JP" altLang="en-US" smtClean="0"/>
-              <a:t>2026/5/12</a:t>
+              <a:t>2026/5/25</a:t>
             </a:fld>
             <a:endParaRPr kumimoji="1" lang="ja-JP" altLang="en-US"/>
           </a:p>
@@ -4317,7 +4318,7 @@
           <a:p>
             <a:fld id="{338BEB56-2203-4F1F-BF95-3372EF3570AD}" type="datetimeFigureOut">
               <a:rPr kumimoji="1" lang="ja-JP" altLang="en-US" smtClean="0"/>
-              <a:t>2026/5/12</a:t>
+              <a:t>2026/5/25</a:t>
             </a:fld>
             <a:endParaRPr kumimoji="1" lang="ja-JP" altLang="en-US"/>
           </a:p>
@@ -4552,7 +4553,7 @@
           <a:p>
             <a:fld id="{338BEB56-2203-4F1F-BF95-3372EF3570AD}" type="datetimeFigureOut">
               <a:rPr kumimoji="1" lang="ja-JP" altLang="en-US" smtClean="0"/>
-              <a:t>2026/5/12</a:t>
+              <a:t>2026/5/25</a:t>
             </a:fld>
             <a:endParaRPr kumimoji="1" lang="ja-JP" altLang="en-US"/>
           </a:p>
@@ -5263,7 +5264,7 @@
           <a:p>
             <a:fld id="{338BEB56-2203-4F1F-BF95-3372EF3570AD}" type="datetimeFigureOut">
               <a:rPr kumimoji="1" lang="ja-JP" altLang="en-US" smtClean="0"/>
-              <a:t>2026/5/12</a:t>
+              <a:t>2026/5/25</a:t>
             </a:fld>
             <a:endParaRPr kumimoji="1" lang="ja-JP" altLang="en-US"/>
           </a:p>
@@ -5372,7 +5373,7 @@
           <a:p>
             <a:fld id="{338BEB56-2203-4F1F-BF95-3372EF3570AD}" type="datetimeFigureOut">
               <a:rPr kumimoji="1" lang="ja-JP" altLang="en-US" smtClean="0"/>
-              <a:t>2026/5/12</a:t>
+              <a:t>2026/5/25</a:t>
             </a:fld>
             <a:endParaRPr kumimoji="1" lang="ja-JP" altLang="en-US"/>
           </a:p>
@@ -5556,7 +5557,7 @@
           <a:p>
             <a:fld id="{338BEB56-2203-4F1F-BF95-3372EF3570AD}" type="datetimeFigureOut">
               <a:rPr kumimoji="1" lang="ja-JP" altLang="en-US" smtClean="0"/>
-              <a:t>2026/5/12</a:t>
+              <a:t>2026/5/25</a:t>
             </a:fld>
             <a:endParaRPr kumimoji="1" lang="ja-JP" altLang="en-US"/>
           </a:p>
@@ -5651,7 +5652,7 @@
           <a:p>
             <a:fld id="{338BEB56-2203-4F1F-BF95-3372EF3570AD}" type="datetimeFigureOut">
               <a:rPr kumimoji="1" lang="ja-JP" altLang="en-US" smtClean="0"/>
-              <a:t>2026/5/12</a:t>
+              <a:t>2026/5/25</a:t>
             </a:fld>
             <a:endParaRPr kumimoji="1" lang="ja-JP" altLang="en-US"/>
           </a:p>
@@ -5898,7 +5899,7 @@
           <a:p>
             <a:fld id="{338BEB56-2203-4F1F-BF95-3372EF3570AD}" type="datetimeFigureOut">
               <a:rPr kumimoji="1" lang="ja-JP" altLang="en-US" smtClean="0"/>
-              <a:t>2026/5/12</a:t>
+              <a:t>2026/5/25</a:t>
             </a:fld>
             <a:endParaRPr kumimoji="1" lang="ja-JP" altLang="en-US"/>
           </a:p>
@@ -7197,8 +7198,68 @@
         </p:blipFill>
         <p:spPr>
           <a:xfrm>
-            <a:off x="4724208" y="1480865"/>
+            <a:off x="9108921" y="1150359"/>
             <a:ext cx="2743583" cy="3896269"/>
+          </a:xfrm>
+          <a:prstGeom prst="rect">
+            <a:avLst/>
+          </a:prstGeom>
+        </p:spPr>
+      </p:pic>
+      <p:pic>
+        <p:nvPicPr>
+          <p:cNvPr id="4" name="図 3">
+            <a:extLst>
+              <a:ext uri="{FF2B5EF4-FFF2-40B4-BE49-F238E27FC236}">
+                <a16:creationId xmlns:a16="http://schemas.microsoft.com/office/drawing/2014/main" id="{934203AB-8C0A-54AF-726C-4179878EF12E}"/>
+              </a:ext>
+            </a:extLst>
+          </p:cNvPr>
+          <p:cNvPicPr>
+            <a:picLocks noChangeAspect="1"/>
+          </p:cNvPicPr>
+          <p:nvPr/>
+        </p:nvPicPr>
+        <p:blipFill>
+          <a:blip r:embed="rId3"/>
+          <a:stretch>
+            <a:fillRect/>
+          </a:stretch>
+        </p:blipFill>
+        <p:spPr>
+          <a:xfrm>
+            <a:off x="964610" y="1947656"/>
+            <a:ext cx="7354326" cy="2962688"/>
+          </a:xfrm>
+          <a:prstGeom prst="rect">
+            <a:avLst/>
+          </a:prstGeom>
+        </p:spPr>
+      </p:pic>
+      <p:pic>
+        <p:nvPicPr>
+          <p:cNvPr id="6" name="図 5">
+            <a:extLst>
+              <a:ext uri="{FF2B5EF4-FFF2-40B4-BE49-F238E27FC236}">
+                <a16:creationId xmlns:a16="http://schemas.microsoft.com/office/drawing/2014/main" id="{5C2FC983-48A8-809C-C0A6-C2FD0ABBF696}"/>
+              </a:ext>
+            </a:extLst>
+          </p:cNvPr>
+          <p:cNvPicPr>
+            <a:picLocks noChangeAspect="1"/>
+          </p:cNvPicPr>
+          <p:nvPr/>
+        </p:nvPicPr>
+        <p:blipFill>
+          <a:blip r:embed="rId4"/>
+          <a:stretch>
+            <a:fillRect/>
+          </a:stretch>
+        </p:blipFill>
+        <p:spPr>
+          <a:xfrm>
+            <a:off x="2728442" y="1871445"/>
+            <a:ext cx="6735115" cy="3115110"/>
           </a:xfrm>
           <a:prstGeom prst="rect">
             <a:avLst/>
@@ -7560,6 +7621,66 @@
     <p:extLst>
       <p:ext uri="{BB962C8B-B14F-4D97-AF65-F5344CB8AC3E}">
         <p14:creationId xmlns:p14="http://schemas.microsoft.com/office/powerpoint/2010/main" val="2559489897"/>
+      </p:ext>
+    </p:extLst>
+  </p:cSld>
+  <p:clrMapOvr>
+    <a:masterClrMapping/>
+  </p:clrMapOvr>
+</p:sld>
+</file>
+
+<file path=ppt/slides/slide8.xml><?xml version="1.0" encoding="utf-8"?>
+<p:sld xmlns:a="http://schemas.openxmlformats.org/drawingml/2006/main" xmlns:r="http://schemas.openxmlformats.org/officeDocument/2006/relationships" xmlns:p="http://schemas.openxmlformats.org/presentationml/2006/main">
+  <p:cSld>
+    <p:spTree>
+      <p:nvGrpSpPr>
+        <p:cNvPr id="1" name=""/>
+        <p:cNvGrpSpPr/>
+        <p:nvPr/>
+      </p:nvGrpSpPr>
+      <p:grpSpPr>
+        <a:xfrm>
+          <a:off x="0" y="0"/>
+          <a:ext cx="0" cy="0"/>
+          <a:chOff x="0" y="0"/>
+          <a:chExt cx="0" cy="0"/>
+        </a:xfrm>
+      </p:grpSpPr>
+      <p:pic>
+        <p:nvPicPr>
+          <p:cNvPr id="3" name="図 2">
+            <a:extLst>
+              <a:ext uri="{FF2B5EF4-FFF2-40B4-BE49-F238E27FC236}">
+                <a16:creationId xmlns:a16="http://schemas.microsoft.com/office/drawing/2014/main" id="{426E9B5F-651F-6C26-05E8-A17A06A7D084}"/>
+              </a:ext>
+            </a:extLst>
+          </p:cNvPr>
+          <p:cNvPicPr>
+            <a:picLocks noChangeAspect="1"/>
+          </p:cNvPicPr>
+          <p:nvPr/>
+        </p:nvPicPr>
+        <p:blipFill>
+          <a:blip r:embed="rId2"/>
+          <a:stretch>
+            <a:fillRect/>
+          </a:stretch>
+        </p:blipFill>
+        <p:spPr>
+          <a:xfrm>
+            <a:off x="2261652" y="875943"/>
+            <a:ext cx="7668695" cy="5106113"/>
+          </a:xfrm>
+          <a:prstGeom prst="rect">
+            <a:avLst/>
+          </a:prstGeom>
+        </p:spPr>
+      </p:pic>
+    </p:spTree>
+    <p:extLst>
+      <p:ext uri="{BB962C8B-B14F-4D97-AF65-F5344CB8AC3E}">
+        <p14:creationId xmlns:p14="http://schemas.microsoft.com/office/powerpoint/2010/main" val="1155290597"/>
       </p:ext>
     </p:extLst>
   </p:cSld>

--- a/images/dataintro_fig.pptx
+++ b/images/dataintro_fig.pptx
@@ -13,6 +13,7 @@
     <p:sldId id="258" r:id="rId10"/>
     <p:sldId id="260" r:id="rId11"/>
     <p:sldId id="264" r:id="rId12"/>
+    <p:sldId id="265" r:id="rId13"/>
   </p:sldIdLst>
   <p:sldSz cx="12192000" cy="6858000"/>
   <p:notesSz cx="6858000" cy="9144000"/>
@@ -3332,7 +3333,7 @@
           <a:p>
             <a:fld id="{338BEB56-2203-4F1F-BF95-3372EF3570AD}" type="datetimeFigureOut">
               <a:rPr kumimoji="1" lang="ja-JP" altLang="en-US" smtClean="0"/>
-              <a:t>2026/5/25</a:t>
+              <a:t>2026/5/26</a:t>
             </a:fld>
             <a:endParaRPr kumimoji="1" lang="ja-JP" altLang="en-US"/>
           </a:p>
@@ -3516,7 +3517,7 @@
           <a:p>
             <a:fld id="{338BEB56-2203-4F1F-BF95-3372EF3570AD}" type="datetimeFigureOut">
               <a:rPr kumimoji="1" lang="ja-JP" altLang="en-US" smtClean="0"/>
-              <a:t>2026/5/25</a:t>
+              <a:t>2026/5/26</a:t>
             </a:fld>
             <a:endParaRPr kumimoji="1" lang="ja-JP" altLang="en-US"/>
           </a:p>
@@ -3733,7 +3734,7 @@
           <a:p>
             <a:fld id="{338BEB56-2203-4F1F-BF95-3372EF3570AD}" type="datetimeFigureOut">
               <a:rPr kumimoji="1" lang="ja-JP" altLang="en-US" smtClean="0"/>
-              <a:t>2026/5/25</a:t>
+              <a:t>2026/5/26</a:t>
             </a:fld>
             <a:endParaRPr kumimoji="1" lang="ja-JP" altLang="en-US"/>
           </a:p>
@@ -4023,7 +4024,7 @@
           <a:p>
             <a:fld id="{338BEB56-2203-4F1F-BF95-3372EF3570AD}" type="datetimeFigureOut">
               <a:rPr kumimoji="1" lang="ja-JP" altLang="en-US" smtClean="0"/>
-              <a:t>2026/5/25</a:t>
+              <a:t>2026/5/26</a:t>
             </a:fld>
             <a:endParaRPr kumimoji="1" lang="ja-JP" altLang="en-US"/>
           </a:p>
@@ -4318,7 +4319,7 @@
           <a:p>
             <a:fld id="{338BEB56-2203-4F1F-BF95-3372EF3570AD}" type="datetimeFigureOut">
               <a:rPr kumimoji="1" lang="ja-JP" altLang="en-US" smtClean="0"/>
-              <a:t>2026/5/25</a:t>
+              <a:t>2026/5/26</a:t>
             </a:fld>
             <a:endParaRPr kumimoji="1" lang="ja-JP" altLang="en-US"/>
           </a:p>
@@ -4553,7 +4554,7 @@
           <a:p>
             <a:fld id="{338BEB56-2203-4F1F-BF95-3372EF3570AD}" type="datetimeFigureOut">
               <a:rPr kumimoji="1" lang="ja-JP" altLang="en-US" smtClean="0"/>
-              <a:t>2026/5/25</a:t>
+              <a:t>2026/5/26</a:t>
             </a:fld>
             <a:endParaRPr kumimoji="1" lang="ja-JP" altLang="en-US"/>
           </a:p>
@@ -5264,7 +5265,7 @@
           <a:p>
             <a:fld id="{338BEB56-2203-4F1F-BF95-3372EF3570AD}" type="datetimeFigureOut">
               <a:rPr kumimoji="1" lang="ja-JP" altLang="en-US" smtClean="0"/>
-              <a:t>2026/5/25</a:t>
+              <a:t>2026/5/26</a:t>
             </a:fld>
             <a:endParaRPr kumimoji="1" lang="ja-JP" altLang="en-US"/>
           </a:p>
@@ -5373,7 +5374,7 @@
           <a:p>
             <a:fld id="{338BEB56-2203-4F1F-BF95-3372EF3570AD}" type="datetimeFigureOut">
               <a:rPr kumimoji="1" lang="ja-JP" altLang="en-US" smtClean="0"/>
-              <a:t>2026/5/25</a:t>
+              <a:t>2026/5/26</a:t>
             </a:fld>
             <a:endParaRPr kumimoji="1" lang="ja-JP" altLang="en-US"/>
           </a:p>
@@ -5557,7 +5558,7 @@
           <a:p>
             <a:fld id="{338BEB56-2203-4F1F-BF95-3372EF3570AD}" type="datetimeFigureOut">
               <a:rPr kumimoji="1" lang="ja-JP" altLang="en-US" smtClean="0"/>
-              <a:t>2026/5/25</a:t>
+              <a:t>2026/5/26</a:t>
             </a:fld>
             <a:endParaRPr kumimoji="1" lang="ja-JP" altLang="en-US"/>
           </a:p>
@@ -5652,7 +5653,7 @@
           <a:p>
             <a:fld id="{338BEB56-2203-4F1F-BF95-3372EF3570AD}" type="datetimeFigureOut">
               <a:rPr kumimoji="1" lang="ja-JP" altLang="en-US" smtClean="0"/>
-              <a:t>2026/5/25</a:t>
+              <a:t>2026/5/26</a:t>
             </a:fld>
             <a:endParaRPr kumimoji="1" lang="ja-JP" altLang="en-US"/>
           </a:p>
@@ -5899,7 +5900,7 @@
           <a:p>
             <a:fld id="{338BEB56-2203-4F1F-BF95-3372EF3570AD}" type="datetimeFigureOut">
               <a:rPr kumimoji="1" lang="ja-JP" altLang="en-US" smtClean="0"/>
-              <a:t>2026/5/25</a:t>
+              <a:t>2026/5/26</a:t>
             </a:fld>
             <a:endParaRPr kumimoji="1" lang="ja-JP" altLang="en-US"/>
           </a:p>
@@ -7690,6 +7691,96 @@
 </p:sld>
 </file>
 
+<file path=ppt/slides/slide9.xml><?xml version="1.0" encoding="utf-8"?>
+<p:sld xmlns:a="http://schemas.openxmlformats.org/drawingml/2006/main" xmlns:r="http://schemas.openxmlformats.org/officeDocument/2006/relationships" xmlns:p="http://schemas.openxmlformats.org/presentationml/2006/main">
+  <p:cSld>
+    <p:spTree>
+      <p:nvGrpSpPr>
+        <p:cNvPr id="1" name=""/>
+        <p:cNvGrpSpPr/>
+        <p:nvPr/>
+      </p:nvGrpSpPr>
+      <p:grpSpPr>
+        <a:xfrm>
+          <a:off x="0" y="0"/>
+          <a:ext cx="0" cy="0"/>
+          <a:chOff x="0" y="0"/>
+          <a:chExt cx="0" cy="0"/>
+        </a:xfrm>
+      </p:grpSpPr>
+      <p:pic>
+        <p:nvPicPr>
+          <p:cNvPr id="3" name="図 2">
+            <a:extLst>
+              <a:ext uri="{FF2B5EF4-FFF2-40B4-BE49-F238E27FC236}">
+                <a16:creationId xmlns:a16="http://schemas.microsoft.com/office/drawing/2014/main" id="{909C53E1-11CF-5D8B-63F1-0E84B55F466E}"/>
+              </a:ext>
+            </a:extLst>
+          </p:cNvPr>
+          <p:cNvPicPr>
+            <a:picLocks noChangeAspect="1"/>
+          </p:cNvPicPr>
+          <p:nvPr/>
+        </p:nvPicPr>
+        <p:blipFill>
+          <a:blip r:embed="rId2"/>
+          <a:stretch>
+            <a:fillRect/>
+          </a:stretch>
+        </p:blipFill>
+        <p:spPr>
+          <a:xfrm>
+            <a:off x="1096582" y="267129"/>
+            <a:ext cx="4887007" cy="2886478"/>
+          </a:xfrm>
+          <a:prstGeom prst="rect">
+            <a:avLst/>
+          </a:prstGeom>
+        </p:spPr>
+      </p:pic>
+      <p:pic>
+        <p:nvPicPr>
+          <p:cNvPr id="5" name="図 4">
+            <a:extLst>
+              <a:ext uri="{FF2B5EF4-FFF2-40B4-BE49-F238E27FC236}">
+                <a16:creationId xmlns:a16="http://schemas.microsoft.com/office/drawing/2014/main" id="{18E77446-9656-5F49-FA81-989511050D03}"/>
+              </a:ext>
+            </a:extLst>
+          </p:cNvPr>
+          <p:cNvPicPr>
+            <a:picLocks noChangeAspect="1"/>
+          </p:cNvPicPr>
+          <p:nvPr/>
+        </p:nvPicPr>
+        <p:blipFill>
+          <a:blip r:embed="rId3"/>
+          <a:stretch>
+            <a:fillRect/>
+          </a:stretch>
+        </p:blipFill>
+        <p:spPr>
+          <a:xfrm>
+            <a:off x="5162649" y="3310766"/>
+            <a:ext cx="4334480" cy="2924583"/>
+          </a:xfrm>
+          <a:prstGeom prst="rect">
+            <a:avLst/>
+          </a:prstGeom>
+        </p:spPr>
+      </p:pic>
+    </p:spTree>
+    <p:extLst>
+      <p:ext uri="{BB962C8B-B14F-4D97-AF65-F5344CB8AC3E}">
+        <p14:creationId xmlns:p14="http://schemas.microsoft.com/office/powerpoint/2010/main" val="3086483316"/>
+      </p:ext>
+    </p:extLst>
+  </p:cSld>
+  <p:clrMapOvr>
+    <a:masterClrMapping/>
+  </p:clrMapOvr>
+</p:sld>
+</file>
+
 <file path=ppt/theme/theme1.xml><?xml version="1.0" encoding="utf-8"?>
 <a:theme xmlns:a="http://schemas.openxmlformats.org/drawingml/2006/main" name="handout">
   <a:themeElements>
@@ -8036,18 +8127,18 @@
 </file>
 
 <file path=customXml/item2.xml><?xml version="1.0" encoding="utf-8"?>
+<p:properties xmlns:p="http://schemas.microsoft.com/office/2006/metadata/properties" xmlns:xsi="http://www.w3.org/2001/XMLSchema-instance" xmlns:pc="http://schemas.microsoft.com/office/infopath/2007/PartnerControls">
+  <documentManagement/>
+</p:properties>
+</file>
+
+<file path=customXml/item3.xml><?xml version="1.0" encoding="utf-8"?>
 <?mso-contentType ?>
 <FormTemplates xmlns="http://schemas.microsoft.com/sharepoint/v3/contenttype/forms">
   <Display>DocumentLibraryForm</Display>
   <Edit>DocumentLibraryForm</Edit>
   <New>DocumentLibraryForm</New>
 </FormTemplates>
-</file>
-
-<file path=customXml/item3.xml><?xml version="1.0" encoding="utf-8"?>
-<p:properties xmlns:p="http://schemas.microsoft.com/office/2006/metadata/properties" xmlns:xsi="http://www.w3.org/2001/XMLSchema-instance" xmlns:pc="http://schemas.microsoft.com/office/infopath/2007/PartnerControls">
-  <documentManagement/>
-</p:properties>
 </file>
 
 <file path=customXml/itemProps1.xml><?xml version="1.0" encoding="utf-8"?>
@@ -8069,14 +8160,6 @@
 </file>
 
 <file path=customXml/itemProps2.xml><?xml version="1.0" encoding="utf-8"?>
-<ds:datastoreItem xmlns:ds="http://schemas.openxmlformats.org/officeDocument/2006/customXml" ds:itemID="{AB851738-DD37-4E03-A76B-B763E2757B0B}">
-  <ds:schemaRefs>
-    <ds:schemaRef ds:uri="http://schemas.microsoft.com/sharepoint/v3/contenttype/forms"/>
-  </ds:schemaRefs>
-</ds:datastoreItem>
-</file>
-
-<file path=customXml/itemProps3.xml><?xml version="1.0" encoding="utf-8"?>
 <ds:datastoreItem xmlns:ds="http://schemas.openxmlformats.org/officeDocument/2006/customXml" ds:itemID="{5D972508-A93B-4CFB-9C27-BD808F279085}">
   <ds:schemaRefs>
     <ds:schemaRef ds:uri="c92ae596-f2ea-4fe5-8164-7ef5be6a5706"/>
@@ -8090,4 +8173,12 @@
     <ds:schemaRef ds:uri="http://purl.org/dc/elements/1.1/"/>
   </ds:schemaRefs>
 </ds:datastoreItem>
+</file>
+
+<file path=customXml/itemProps3.xml><?xml version="1.0" encoding="utf-8"?>
+<ds:datastoreItem xmlns:ds="http://schemas.openxmlformats.org/officeDocument/2006/customXml" ds:itemID="{AB851738-DD37-4E03-A76B-B763E2757B0B}">
+  <ds:schemaRefs>
+    <ds:schemaRef ds:uri="http://schemas.microsoft.com/sharepoint/v3/contenttype/forms"/>
+  </ds:schemaRefs>
+</ds:datastoreItem>
 </file>
--- a/images/dataintro_fig.pptx
+++ b/images/dataintro_fig.pptx
@@ -3333,7 +3333,7 @@
           <a:p>
             <a:fld id="{338BEB56-2203-4F1F-BF95-3372EF3570AD}" type="datetimeFigureOut">
               <a:rPr kumimoji="1" lang="ja-JP" altLang="en-US" smtClean="0"/>
-              <a:t>2026/5/26</a:t>
+              <a:t>2026/6/23</a:t>
             </a:fld>
             <a:endParaRPr kumimoji="1" lang="ja-JP" altLang="en-US"/>
           </a:p>
@@ -3517,7 +3517,7 @@
           <a:p>
             <a:fld id="{338BEB56-2203-4F1F-BF95-3372EF3570AD}" type="datetimeFigureOut">
               <a:rPr kumimoji="1" lang="ja-JP" altLang="en-US" smtClean="0"/>
-              <a:t>2026/5/26</a:t>
+              <a:t>2026/6/23</a:t>
             </a:fld>
             <a:endParaRPr kumimoji="1" lang="ja-JP" altLang="en-US"/>
           </a:p>
@@ -3734,7 +3734,7 @@
           <a:p>
             <a:fld id="{338BEB56-2203-4F1F-BF95-3372EF3570AD}" type="datetimeFigureOut">
               <a:rPr kumimoji="1" lang="ja-JP" altLang="en-US" smtClean="0"/>
-              <a:t>2026/5/26</a:t>
+              <a:t>2026/6/23</a:t>
             </a:fld>
             <a:endParaRPr kumimoji="1" lang="ja-JP" altLang="en-US"/>
           </a:p>
@@ -4024,7 +4024,7 @@
           <a:p>
             <a:fld id="{338BEB56-2203-4F1F-BF95-3372EF3570AD}" type="datetimeFigureOut">
               <a:rPr kumimoji="1" lang="ja-JP" altLang="en-US" smtClean="0"/>
-              <a:t>2026/5/26</a:t>
+              <a:t>2026/6/23</a:t>
             </a:fld>
             <a:endParaRPr kumimoji="1" lang="ja-JP" altLang="en-US"/>
           </a:p>
@@ -4319,7 +4319,7 @@
           <a:p>
             <a:fld id="{338BEB56-2203-4F1F-BF95-3372EF3570AD}" type="datetimeFigureOut">
               <a:rPr kumimoji="1" lang="ja-JP" altLang="en-US" smtClean="0"/>
-              <a:t>2026/5/26</a:t>
+              <a:t>2026/6/23</a:t>
             </a:fld>
             <a:endParaRPr kumimoji="1" lang="ja-JP" altLang="en-US"/>
           </a:p>
@@ -4554,7 +4554,7 @@
           <a:p>
             <a:fld id="{338BEB56-2203-4F1F-BF95-3372EF3570AD}" type="datetimeFigureOut">
               <a:rPr kumimoji="1" lang="ja-JP" altLang="en-US" smtClean="0"/>
-              <a:t>2026/5/26</a:t>
+              <a:t>2026/6/23</a:t>
             </a:fld>
             <a:endParaRPr kumimoji="1" lang="ja-JP" altLang="en-US"/>
           </a:p>
@@ -5265,7 +5265,7 @@
           <a:p>
             <a:fld id="{338BEB56-2203-4F1F-BF95-3372EF3570AD}" type="datetimeFigureOut">
               <a:rPr kumimoji="1" lang="ja-JP" altLang="en-US" smtClean="0"/>
-              <a:t>2026/5/26</a:t>
+              <a:t>2026/6/23</a:t>
             </a:fld>
             <a:endParaRPr kumimoji="1" lang="ja-JP" altLang="en-US"/>
           </a:p>
@@ -5374,7 +5374,7 @@
           <a:p>
             <a:fld id="{338BEB56-2203-4F1F-BF95-3372EF3570AD}" type="datetimeFigureOut">
               <a:rPr kumimoji="1" lang="ja-JP" altLang="en-US" smtClean="0"/>
-              <a:t>2026/5/26</a:t>
+              <a:t>2026/6/23</a:t>
             </a:fld>
             <a:endParaRPr kumimoji="1" lang="ja-JP" altLang="en-US"/>
           </a:p>
@@ -5558,7 +5558,7 @@
           <a:p>
             <a:fld id="{338BEB56-2203-4F1F-BF95-3372EF3570AD}" type="datetimeFigureOut">
               <a:rPr kumimoji="1" lang="ja-JP" altLang="en-US" smtClean="0"/>
-              <a:t>2026/5/26</a:t>
+              <a:t>2026/6/23</a:t>
             </a:fld>
             <a:endParaRPr kumimoji="1" lang="ja-JP" altLang="en-US"/>
           </a:p>
@@ -5653,7 +5653,7 @@
           <a:p>
             <a:fld id="{338BEB56-2203-4F1F-BF95-3372EF3570AD}" type="datetimeFigureOut">
               <a:rPr kumimoji="1" lang="ja-JP" altLang="en-US" smtClean="0"/>
-              <a:t>2026/5/26</a:t>
+              <a:t>2026/6/23</a:t>
             </a:fld>
             <a:endParaRPr kumimoji="1" lang="ja-JP" altLang="en-US"/>
           </a:p>
@@ -5900,7 +5900,7 @@
           <a:p>
             <a:fld id="{338BEB56-2203-4F1F-BF95-3372EF3570AD}" type="datetimeFigureOut">
               <a:rPr kumimoji="1" lang="ja-JP" altLang="en-US" smtClean="0"/>
-              <a:t>2026/5/26</a:t>
+              <a:t>2026/6/23</a:t>
             </a:fld>
             <a:endParaRPr kumimoji="1" lang="ja-JP" altLang="en-US"/>
           </a:p>
@@ -7768,6 +7768,36 @@
           </a:prstGeom>
         </p:spPr>
       </p:pic>
+      <p:pic>
+        <p:nvPicPr>
+          <p:cNvPr id="4" name="図 3">
+            <a:extLst>
+              <a:ext uri="{FF2B5EF4-FFF2-40B4-BE49-F238E27FC236}">
+                <a16:creationId xmlns:a16="http://schemas.microsoft.com/office/drawing/2014/main" id="{103925F6-A20B-6B19-6885-7B9B2EAED757}"/>
+              </a:ext>
+            </a:extLst>
+          </p:cNvPr>
+          <p:cNvPicPr>
+            <a:picLocks noChangeAspect="1"/>
+          </p:cNvPicPr>
+          <p:nvPr/>
+        </p:nvPicPr>
+        <p:blipFill>
+          <a:blip r:embed="rId4"/>
+          <a:stretch>
+            <a:fillRect/>
+          </a:stretch>
+        </p:blipFill>
+        <p:spPr>
+          <a:xfrm>
+            <a:off x="570729" y="3765184"/>
+            <a:ext cx="5525271" cy="1857634"/>
+          </a:xfrm>
+          <a:prstGeom prst="rect">
+            <a:avLst/>
+          </a:prstGeom>
+        </p:spPr>
+      </p:pic>
     </p:spTree>
     <p:extLst>
       <p:ext uri="{BB962C8B-B14F-4D97-AF65-F5344CB8AC3E}">
@@ -7983,6 +8013,12 @@
 </file>
 
 <file path=customXml/item1.xml><?xml version="1.0" encoding="utf-8"?>
+<p:properties xmlns:p="http://schemas.microsoft.com/office/2006/metadata/properties" xmlns:xsi="http://www.w3.org/2001/XMLSchema-instance" xmlns:pc="http://schemas.microsoft.com/office/infopath/2007/PartnerControls">
+  <documentManagement/>
+</p:properties>
+</file>
+
+<file path=customXml/item2.xml><?xml version="1.0" encoding="utf-8"?>
 <ct:contentTypeSchema xmlns:ct="http://schemas.microsoft.com/office/2006/metadata/contentType" xmlns:ma="http://schemas.microsoft.com/office/2006/metadata/properties/metaAttributes" ct:_="" ma:_="" ma:contentTypeName="ドキュメント" ma:contentTypeID="0x010100219926A4C099B3408C0368587ACC6DCA" ma:contentTypeVersion="4" ma:contentTypeDescription="新しいドキュメントを作成します。" ma:contentTypeScope="" ma:versionID="affc7309a2dfb5e1d1086f7d28d4c8f9">
   <xsd:schema xmlns:xsd="http://www.w3.org/2001/XMLSchema" xmlns:xs="http://www.w3.org/2001/XMLSchema" xmlns:p="http://schemas.microsoft.com/office/2006/metadata/properties" xmlns:ns3="c92ae596-f2ea-4fe5-8164-7ef5be6a5706" targetNamespace="http://schemas.microsoft.com/office/2006/metadata/properties" ma:root="true" ma:fieldsID="aad9b398109b3af73f51846e4562e877" ns3:_="">
     <xsd:import namespace="c92ae596-f2ea-4fe5-8164-7ef5be6a5706"/>
@@ -8126,12 +8162,6 @@
 </ct:contentTypeSchema>
 </file>
 
-<file path=customXml/item2.xml><?xml version="1.0" encoding="utf-8"?>
-<p:properties xmlns:p="http://schemas.microsoft.com/office/2006/metadata/properties" xmlns:xsi="http://www.w3.org/2001/XMLSchema-instance" xmlns:pc="http://schemas.microsoft.com/office/infopath/2007/PartnerControls">
-  <documentManagement/>
-</p:properties>
-</file>
-
 <file path=customXml/item3.xml><?xml version="1.0" encoding="utf-8"?>
 <?mso-contentType ?>
 <FormTemplates xmlns="http://schemas.microsoft.com/sharepoint/v3/contenttype/forms">
@@ -8142,6 +8172,22 @@
 </file>
 
 <file path=customXml/itemProps1.xml><?xml version="1.0" encoding="utf-8"?>
+<ds:datastoreItem xmlns:ds="http://schemas.openxmlformats.org/officeDocument/2006/customXml" ds:itemID="{5D972508-A93B-4CFB-9C27-BD808F279085}">
+  <ds:schemaRefs>
+    <ds:schemaRef ds:uri="c92ae596-f2ea-4fe5-8164-7ef5be6a5706"/>
+    <ds:schemaRef ds:uri="http://purl.org/dc/dcmitype/"/>
+    <ds:schemaRef ds:uri="http://schemas.microsoft.com/office/2006/metadata/properties"/>
+    <ds:schemaRef ds:uri="http://www.w3.org/XML/1998/namespace"/>
+    <ds:schemaRef ds:uri="http://schemas.openxmlformats.org/package/2006/metadata/core-properties"/>
+    <ds:schemaRef ds:uri="http://purl.org/dc/terms/"/>
+    <ds:schemaRef ds:uri="http://schemas.microsoft.com/office/2006/documentManagement/types"/>
+    <ds:schemaRef ds:uri="http://schemas.microsoft.com/office/infopath/2007/PartnerControls"/>
+    <ds:schemaRef ds:uri="http://purl.org/dc/elements/1.1/"/>
+  </ds:schemaRefs>
+</ds:datastoreItem>
+</file>
+
+<file path=customXml/itemProps2.xml><?xml version="1.0" encoding="utf-8"?>
 <ds:datastoreItem xmlns:ds="http://schemas.openxmlformats.org/officeDocument/2006/customXml" ds:itemID="{1E1D599E-7965-4A84-83CE-FB3B4A91916C}">
   <ds:schemaRefs>
     <ds:schemaRef ds:uri="http://schemas.microsoft.com/office/2006/metadata/contentType"/>
@@ -8159,22 +8205,6 @@
 </ds:datastoreItem>
 </file>
 
-<file path=customXml/itemProps2.xml><?xml version="1.0" encoding="utf-8"?>
-<ds:datastoreItem xmlns:ds="http://schemas.openxmlformats.org/officeDocument/2006/customXml" ds:itemID="{5D972508-A93B-4CFB-9C27-BD808F279085}">
-  <ds:schemaRefs>
-    <ds:schemaRef ds:uri="c92ae596-f2ea-4fe5-8164-7ef5be6a5706"/>
-    <ds:schemaRef ds:uri="http://purl.org/dc/dcmitype/"/>
-    <ds:schemaRef ds:uri="http://schemas.microsoft.com/office/2006/metadata/properties"/>
-    <ds:schemaRef ds:uri="http://www.w3.org/XML/1998/namespace"/>
-    <ds:schemaRef ds:uri="http://schemas.openxmlformats.org/package/2006/metadata/core-properties"/>
-    <ds:schemaRef ds:uri="http://purl.org/dc/terms/"/>
-    <ds:schemaRef ds:uri="http://schemas.microsoft.com/office/2006/documentManagement/types"/>
-    <ds:schemaRef ds:uri="http://schemas.microsoft.com/office/infopath/2007/PartnerControls"/>
-    <ds:schemaRef ds:uri="http://purl.org/dc/elements/1.1/"/>
-  </ds:schemaRefs>
-</ds:datastoreItem>
-</file>
-
 <file path=customXml/itemProps3.xml><?xml version="1.0" encoding="utf-8"?>
 <ds:datastoreItem xmlns:ds="http://schemas.openxmlformats.org/officeDocument/2006/customXml" ds:itemID="{AB851738-DD37-4E03-A76B-B763E2757B0B}">
   <ds:schemaRefs>
